--- a/Week5/week5_lecture_slides.pptx
+++ b/Week5/week5_lecture_slides.pptx
@@ -4,32 +4,35 @@
   <p:sldMasterIdLst>
     <p:sldMasterId id="2147483648" r:id="rId1"/>
   </p:sldMasterIdLst>
+  <p:notesMasterIdLst>
+    <p:notesMasterId r:id="rId25"/>
+  </p:notesMasterIdLst>
   <p:sldIdLst>
-    <p:sldId id="256" r:id="rId7"/>
-    <p:sldId id="257" r:id="rId8"/>
-    <p:sldId id="258" r:id="rId10"/>
-    <p:sldId id="259" r:id="rId11"/>
-    <p:sldId id="260" r:id="rId12"/>
-    <p:sldId id="261" r:id="rId13"/>
-    <p:sldId id="262" r:id="rId14"/>
-    <p:sldId id="263" r:id="rId15"/>
-    <p:sldId id="264" r:id="rId16"/>
-    <p:sldId id="265" r:id="rId17"/>
-    <p:sldId id="266" r:id="rId18"/>
-    <p:sldId id="267" r:id="rId19"/>
-    <p:sldId id="268" r:id="rId20"/>
-    <p:sldId id="269" r:id="rId21"/>
-    <p:sldId id="270" r:id="rId22"/>
-    <p:sldId id="271" r:id="rId23"/>
-    <p:sldId id="272" r:id="rId24"/>
-    <p:sldId id="273" r:id="rId25"/>
-    <p:sldId id="274" r:id="rId26"/>
-    <p:sldId id="275" r:id="rId27"/>
-    <p:sldId id="276" r:id="rId28"/>
-    <p:sldId id="277" r:id="rId29"/>
-    <p:sldId id="278" r:id="rId30"/>
+    <p:sldId id="256" r:id="rId2"/>
+    <p:sldId id="257" r:id="rId3"/>
+    <p:sldId id="258" r:id="rId4"/>
+    <p:sldId id="259" r:id="rId5"/>
+    <p:sldId id="260" r:id="rId6"/>
+    <p:sldId id="261" r:id="rId7"/>
+    <p:sldId id="262" r:id="rId8"/>
+    <p:sldId id="263" r:id="rId9"/>
+    <p:sldId id="264" r:id="rId10"/>
+    <p:sldId id="265" r:id="rId11"/>
+    <p:sldId id="266" r:id="rId12"/>
+    <p:sldId id="267" r:id="rId13"/>
+    <p:sldId id="268" r:id="rId14"/>
+    <p:sldId id="269" r:id="rId15"/>
+    <p:sldId id="270" r:id="rId16"/>
+    <p:sldId id="271" r:id="rId17"/>
+    <p:sldId id="272" r:id="rId18"/>
+    <p:sldId id="273" r:id="rId19"/>
+    <p:sldId id="274" r:id="rId20"/>
+    <p:sldId id="275" r:id="rId21"/>
+    <p:sldId id="276" r:id="rId22"/>
+    <p:sldId id="277" r:id="rId23"/>
+    <p:sldId id="278" r:id="rId24"/>
   </p:sldIdLst>
-  <p:sldSz cx="12191695" cy="6858000" type="screen4x3"/>
+  <p:sldSz cx="12192000" cy="6858000"/>
   <p:notesSz cx="6858000" cy="9144000"/>
   <p:defaultTextStyle>
     <a:defPPr>
@@ -126,11 +129,27 @@
       </a:defRPr>
     </a:lvl9pPr>
   </p:defaultTextStyle>
+  <p:extLst>
+    <p:ext uri="{EFAFB233-063F-42B5-8137-9DF3F51BA10A}">
+      <p15:sldGuideLst xmlns:p15="http://schemas.microsoft.com/office/powerpoint/2012/main">
+        <p15:guide id="1" orient="horz" pos="2160">
+          <p15:clr>
+            <a:srgbClr val="A4A3A4"/>
+          </p15:clr>
+        </p15:guide>
+        <p15:guide id="2" pos="2880">
+          <p15:clr>
+            <a:srgbClr val="A4A3A4"/>
+          </p15:clr>
+        </p15:guide>
+      </p15:sldGuideLst>
+    </p:ext>
+  </p:extLst>
 </p:presentation>
 </file>
 
 <file path=ppt/notesMasters/notesMaster1.xml><?xml version="1.0" encoding="utf-8"?>
-<p:notesMaster xmlns:a="http://schemas.openxmlformats.org/drawingml/2006/main" xmlns:p="http://schemas.openxmlformats.org/presentationml/2006/main" xmlns:r="http://schemas.openxmlformats.org/officeDocument/2006/relationships">
+<p:notesMaster xmlns:a="http://schemas.openxmlformats.org/drawingml/2006/main" xmlns:r="http://schemas.openxmlformats.org/officeDocument/2006/relationships" xmlns:p="http://schemas.openxmlformats.org/presentationml/2006/main">
   <p:cSld>
     <p:bg>
       <p:bgRef idx="1001">
@@ -164,7 +183,7 @@
         <p:spPr>
           <a:xfrm>
             <a:off x="0" y="0"/>
-            <a:ext cx="2971800" cy="457200"/>
+            <a:ext cx="2971800" cy="458788"/>
           </a:xfrm>
           <a:prstGeom prst="rect">
             <a:avLst/>
@@ -195,7 +214,7 @@
         <p:spPr>
           <a:xfrm>
             <a:off x="3884613" y="0"/>
-            <a:ext cx="2971800" cy="457200"/>
+            <a:ext cx="2971800" cy="458788"/>
           </a:xfrm>
           <a:prstGeom prst="rect">
             <a:avLst/>
@@ -209,9 +228,9 @@
             </a:lvl1pPr>
           </a:lstStyle>
           <a:p>
-            <a:fld id="{0F89C1C7-3DCD-1040-A9CF-14679D8B5DDD}" type="datetimeFigureOut">
+            <a:fld id="{3F082A17-06F3-9F43-BE84-B19162BAE043}" type="datetimeFigureOut">
               <a:rPr lang="en-US" smtClean="0"/>
-              <a:t>10/17/16</a:t>
+              <a:t>5/14/26</a:t>
             </a:fld>
             <a:endParaRPr lang="en-US"/>
           </a:p>
@@ -229,8 +248,8 @@
         </p:nvSpPr>
         <p:spPr>
           <a:xfrm>
-            <a:off x="1143000" y="685800"/>
-            <a:ext cx="4572000" cy="3429000"/>
+            <a:off x="685800" y="1143000"/>
+            <a:ext cx="5486400" cy="3086100"/>
           </a:xfrm>
           <a:prstGeom prst="rect">
             <a:avLst/>
@@ -262,8 +281,8 @@
         </p:nvSpPr>
         <p:spPr>
           <a:xfrm>
-            <a:off x="685800" y="4343400"/>
-            <a:ext cx="5486400" cy="4114800"/>
+            <a:off x="685800" y="4400550"/>
+            <a:ext cx="5486400" cy="3600450"/>
           </a:xfrm>
           <a:prstGeom prst="rect">
             <a:avLst/>
@@ -275,35 +294,35 @@
           <a:p>
             <a:pPr lvl="0"/>
             <a:r>
-              <a:rPr lang="en-US" smtClean="0"/>
+              <a:rPr lang="en-GB"/>
               <a:t>Click to edit Master text styles</a:t>
             </a:r>
           </a:p>
           <a:p>
             <a:pPr lvl="1"/>
             <a:r>
-              <a:rPr lang="en-US" smtClean="0"/>
+              <a:rPr lang="en-GB"/>
               <a:t>Second level</a:t>
             </a:r>
           </a:p>
           <a:p>
             <a:pPr lvl="2"/>
             <a:r>
-              <a:rPr lang="en-US" smtClean="0"/>
+              <a:rPr lang="en-GB"/>
               <a:t>Third level</a:t>
             </a:r>
           </a:p>
           <a:p>
             <a:pPr lvl="3"/>
             <a:r>
-              <a:rPr lang="en-US" smtClean="0"/>
+              <a:rPr lang="en-GB"/>
               <a:t>Fourth level</a:t>
             </a:r>
           </a:p>
           <a:p>
             <a:pPr lvl="4"/>
             <a:r>
-              <a:rPr lang="en-US" smtClean="0"/>
+              <a:rPr lang="en-GB"/>
               <a:t>Fifth level</a:t>
             </a:r>
             <a:endParaRPr lang="en-US"/>
@@ -323,7 +342,7 @@
         <p:spPr>
           <a:xfrm>
             <a:off x="0" y="8685213"/>
-            <a:ext cx="2971800" cy="457200"/>
+            <a:ext cx="2971800" cy="458787"/>
           </a:xfrm>
           <a:prstGeom prst="rect">
             <a:avLst/>
@@ -354,7 +373,7 @@
         <p:spPr>
           <a:xfrm>
             <a:off x="3884613" y="8685213"/>
-            <a:ext cx="2971800" cy="457200"/>
+            <a:ext cx="2971800" cy="458787"/>
           </a:xfrm>
           <a:prstGeom prst="rect">
             <a:avLst/>
@@ -368,7 +387,7 @@
             </a:lvl1pPr>
           </a:lstStyle>
           <a:p>
-            <a:fld id="{BB5E49A5-4136-284D-997B-48E1D791AD67}" type="slidenum">
+            <a:fld id="{E7C08045-273C-9345-A9C1-20D8B2E57607}" type="slidenum">
               <a:rPr lang="en-US" smtClean="0"/>
               <a:t>‹#›</a:t>
             </a:fld>
@@ -379,13 +398,13 @@
     </p:spTree>
     <p:extLst>
       <p:ext uri="{BB962C8B-B14F-4D97-AF65-F5344CB8AC3E}">
-        <p14:creationId xmlns:p14="http://schemas.microsoft.com/office/powerpoint/2010/main" val="2623252185"/>
+        <p14:creationId xmlns:p14="http://schemas.microsoft.com/office/powerpoint/2010/main" val="3941391589"/>
       </p:ext>
     </p:extLst>
   </p:cSld>
   <p:clrMap bg1="lt1" tx1="dk1" bg2="lt2" tx2="dk2" accent1="accent1" accent2="accent2" accent3="accent3" accent4="accent4" accent5="accent5" accent6="accent6" hlink="hlink" folHlink="folHlink"/>
   <p:notesStyle>
-    <a:lvl1pPr marL="0" algn="l" defTabSz="457200" rtl="0" eaLnBrk="1" latinLnBrk="0" hangingPunct="1">
+    <a:lvl1pPr marL="0" algn="l" defTabSz="914400" rtl="0" eaLnBrk="1" latinLnBrk="0" hangingPunct="1">
       <a:defRPr sz="1200" kern="1200">
         <a:solidFill>
           <a:schemeClr val="tx1"/>
@@ -395,7 +414,7 @@
         <a:cs typeface="+mn-cs"/>
       </a:defRPr>
     </a:lvl1pPr>
-    <a:lvl2pPr marL="457200" algn="l" defTabSz="457200" rtl="0" eaLnBrk="1" latinLnBrk="0" hangingPunct="1">
+    <a:lvl2pPr marL="457200" algn="l" defTabSz="914400" rtl="0" eaLnBrk="1" latinLnBrk="0" hangingPunct="1">
       <a:defRPr sz="1200" kern="1200">
         <a:solidFill>
           <a:schemeClr val="tx1"/>
@@ -405,7 +424,7 @@
         <a:cs typeface="+mn-cs"/>
       </a:defRPr>
     </a:lvl2pPr>
-    <a:lvl3pPr marL="914400" algn="l" defTabSz="457200" rtl="0" eaLnBrk="1" latinLnBrk="0" hangingPunct="1">
+    <a:lvl3pPr marL="914400" algn="l" defTabSz="914400" rtl="0" eaLnBrk="1" latinLnBrk="0" hangingPunct="1">
       <a:defRPr sz="1200" kern="1200">
         <a:solidFill>
           <a:schemeClr val="tx1"/>
@@ -415,7 +434,7 @@
         <a:cs typeface="+mn-cs"/>
       </a:defRPr>
     </a:lvl3pPr>
-    <a:lvl4pPr marL="1371600" algn="l" defTabSz="457200" rtl="0" eaLnBrk="1" latinLnBrk="0" hangingPunct="1">
+    <a:lvl4pPr marL="1371600" algn="l" defTabSz="914400" rtl="0" eaLnBrk="1" latinLnBrk="0" hangingPunct="1">
       <a:defRPr sz="1200" kern="1200">
         <a:solidFill>
           <a:schemeClr val="tx1"/>
@@ -425,7 +444,7 @@
         <a:cs typeface="+mn-cs"/>
       </a:defRPr>
     </a:lvl4pPr>
-    <a:lvl5pPr marL="1828800" algn="l" defTabSz="457200" rtl="0" eaLnBrk="1" latinLnBrk="0" hangingPunct="1">
+    <a:lvl5pPr marL="1828800" algn="l" defTabSz="914400" rtl="0" eaLnBrk="1" latinLnBrk="0" hangingPunct="1">
       <a:defRPr sz="1200" kern="1200">
         <a:solidFill>
           <a:schemeClr val="tx1"/>
@@ -435,7 +454,7 @@
         <a:cs typeface="+mn-cs"/>
       </a:defRPr>
     </a:lvl5pPr>
-    <a:lvl6pPr marL="2286000" algn="l" defTabSz="457200" rtl="0" eaLnBrk="1" latinLnBrk="0" hangingPunct="1">
+    <a:lvl6pPr marL="2286000" algn="l" defTabSz="914400" rtl="0" eaLnBrk="1" latinLnBrk="0" hangingPunct="1">
       <a:defRPr sz="1200" kern="1200">
         <a:solidFill>
           <a:schemeClr val="tx1"/>
@@ -445,7 +464,7 @@
         <a:cs typeface="+mn-cs"/>
       </a:defRPr>
     </a:lvl6pPr>
-    <a:lvl7pPr marL="2743200" algn="l" defTabSz="457200" rtl="0" eaLnBrk="1" latinLnBrk="0" hangingPunct="1">
+    <a:lvl7pPr marL="2743200" algn="l" defTabSz="914400" rtl="0" eaLnBrk="1" latinLnBrk="0" hangingPunct="1">
       <a:defRPr sz="1200" kern="1200">
         <a:solidFill>
           <a:schemeClr val="tx1"/>
@@ -455,7 +474,7 @@
         <a:cs typeface="+mn-cs"/>
       </a:defRPr>
     </a:lvl7pPr>
-    <a:lvl8pPr marL="3200400" algn="l" defTabSz="457200" rtl="0" eaLnBrk="1" latinLnBrk="0" hangingPunct="1">
+    <a:lvl8pPr marL="3200400" algn="l" defTabSz="914400" rtl="0" eaLnBrk="1" latinLnBrk="0" hangingPunct="1">
       <a:defRPr sz="1200" kern="1200">
         <a:solidFill>
           <a:schemeClr val="tx1"/>
@@ -465,7 +484,7 @@
         <a:cs typeface="+mn-cs"/>
       </a:defRPr>
     </a:lvl8pPr>
-    <a:lvl9pPr marL="3657600" algn="l" defTabSz="457200" rtl="0" eaLnBrk="1" latinLnBrk="0" hangingPunct="1">
+    <a:lvl9pPr marL="3657600" algn="l" defTabSz="914400" rtl="0" eaLnBrk="1" latinLnBrk="0" hangingPunct="1">
       <a:defRPr sz="1200" kern="1200">
         <a:solidFill>
           <a:schemeClr val="tx1"/>
@@ -480,7 +499,7 @@
 </file>
 
 <file path=ppt/notesSlides/notesSlide1.xml><?xml version="1.0" encoding="utf-8"?>
-<p:notes xmlns:a="http://schemas.openxmlformats.org/drawingml/2006/main" xmlns:p="http://schemas.openxmlformats.org/presentationml/2006/main" xmlns:r="http://schemas.openxmlformats.org/officeDocument/2006/relationships">
+<p:notes xmlns:a="http://schemas.openxmlformats.org/drawingml/2006/main" xmlns:r="http://schemas.openxmlformats.org/officeDocument/2006/relationships" xmlns:p="http://schemas.openxmlformats.org/presentationml/2006/main">
   <p:cSld>
     <p:spTree>
       <p:nvGrpSpPr>
@@ -500,7 +519,7 @@
         <p:nvSpPr>
           <p:cNvPr id="2" name="Slide Image Placeholder 1"/>
           <p:cNvSpPr>
-            <a:spLocks noGrp="1"/>
+            <a:spLocks noGrp="1" noRot="1" noChangeAspect="1"/>
           </p:cNvSpPr>
           <p:nvPr>
             <p:ph type="sldImg" idx="2"/>
@@ -515,7 +534,7 @@
             <a:spLocks noGrp="1"/>
           </p:cNvSpPr>
           <p:nvPr>
-            <p:ph type="body" idx="3" sz="quarter"/>
+            <p:ph type="body" sz="quarter" idx="3"/>
           </p:nvPr>
         </p:nvSpPr>
         <p:spPr/>
@@ -539,7 +558,7 @@
             <a:spLocks noGrp="1"/>
           </p:cNvSpPr>
           <p:nvPr>
-            <p:ph type="sldNum" idx="5" sz="quarter"/>
+            <p:ph type="sldNum" sz="quarter" idx="5"/>
           </p:nvPr>
         </p:nvSpPr>
         <p:spPr/>
@@ -553,7 +572,7 @@
 </file>
 
 <file path=ppt/notesSlides/notesSlide10.xml><?xml version="1.0" encoding="utf-8"?>
-<p:notes xmlns:a="http://schemas.openxmlformats.org/drawingml/2006/main" xmlns:p="http://schemas.openxmlformats.org/presentationml/2006/main" xmlns:r="http://schemas.openxmlformats.org/officeDocument/2006/relationships">
+<p:notes xmlns:a="http://schemas.openxmlformats.org/drawingml/2006/main" xmlns:r="http://schemas.openxmlformats.org/officeDocument/2006/relationships" xmlns:p="http://schemas.openxmlformats.org/presentationml/2006/main">
   <p:cSld>
     <p:spTree>
       <p:nvGrpSpPr>
@@ -573,7 +592,7 @@
         <p:nvSpPr>
           <p:cNvPr id="2" name="Slide Image Placeholder 1"/>
           <p:cNvSpPr>
-            <a:spLocks noGrp="1"/>
+            <a:spLocks noGrp="1" noRot="1" noChangeAspect="1"/>
           </p:cNvSpPr>
           <p:nvPr>
             <p:ph type="sldImg" idx="2"/>
@@ -588,7 +607,7 @@
             <a:spLocks noGrp="1"/>
           </p:cNvSpPr>
           <p:nvPr>
-            <p:ph type="body" idx="3" sz="quarter"/>
+            <p:ph type="body" sz="quarter" idx="3"/>
           </p:nvPr>
         </p:nvSpPr>
         <p:spPr/>
@@ -612,7 +631,7 @@
             <a:spLocks noGrp="1"/>
           </p:cNvSpPr>
           <p:nvPr>
-            <p:ph type="sldNum" idx="5" sz="quarter"/>
+            <p:ph type="sldNum" sz="quarter" idx="5"/>
           </p:nvPr>
         </p:nvSpPr>
         <p:spPr/>
@@ -626,7 +645,7 @@
 </file>
 
 <file path=ppt/notesSlides/notesSlide11.xml><?xml version="1.0" encoding="utf-8"?>
-<p:notes xmlns:a="http://schemas.openxmlformats.org/drawingml/2006/main" xmlns:p="http://schemas.openxmlformats.org/presentationml/2006/main" xmlns:r="http://schemas.openxmlformats.org/officeDocument/2006/relationships">
+<p:notes xmlns:a="http://schemas.openxmlformats.org/drawingml/2006/main" xmlns:r="http://schemas.openxmlformats.org/officeDocument/2006/relationships" xmlns:p="http://schemas.openxmlformats.org/presentationml/2006/main">
   <p:cSld>
     <p:spTree>
       <p:nvGrpSpPr>
@@ -646,7 +665,7 @@
         <p:nvSpPr>
           <p:cNvPr id="2" name="Slide Image Placeholder 1"/>
           <p:cNvSpPr>
-            <a:spLocks noGrp="1"/>
+            <a:spLocks noGrp="1" noRot="1" noChangeAspect="1"/>
           </p:cNvSpPr>
           <p:nvPr>
             <p:ph type="sldImg" idx="2"/>
@@ -661,7 +680,7 @@
             <a:spLocks noGrp="1"/>
           </p:cNvSpPr>
           <p:nvPr>
-            <p:ph type="body" idx="3" sz="quarter"/>
+            <p:ph type="body" sz="quarter" idx="3"/>
           </p:nvPr>
         </p:nvSpPr>
         <p:spPr/>
@@ -685,7 +704,7 @@
             <a:spLocks noGrp="1"/>
           </p:cNvSpPr>
           <p:nvPr>
-            <p:ph type="sldNum" idx="5" sz="quarter"/>
+            <p:ph type="sldNum" sz="quarter" idx="5"/>
           </p:nvPr>
         </p:nvSpPr>
         <p:spPr/>
@@ -699,7 +718,7 @@
 </file>
 
 <file path=ppt/notesSlides/notesSlide12.xml><?xml version="1.0" encoding="utf-8"?>
-<p:notes xmlns:a="http://schemas.openxmlformats.org/drawingml/2006/main" xmlns:p="http://schemas.openxmlformats.org/presentationml/2006/main" xmlns:r="http://schemas.openxmlformats.org/officeDocument/2006/relationships">
+<p:notes xmlns:a="http://schemas.openxmlformats.org/drawingml/2006/main" xmlns:r="http://schemas.openxmlformats.org/officeDocument/2006/relationships" xmlns:p="http://schemas.openxmlformats.org/presentationml/2006/main">
   <p:cSld>
     <p:spTree>
       <p:nvGrpSpPr>
@@ -719,7 +738,7 @@
         <p:nvSpPr>
           <p:cNvPr id="2" name="Slide Image Placeholder 1"/>
           <p:cNvSpPr>
-            <a:spLocks noGrp="1"/>
+            <a:spLocks noGrp="1" noRot="1" noChangeAspect="1"/>
           </p:cNvSpPr>
           <p:nvPr>
             <p:ph type="sldImg" idx="2"/>
@@ -734,7 +753,7 @@
             <a:spLocks noGrp="1"/>
           </p:cNvSpPr>
           <p:nvPr>
-            <p:ph type="body" idx="3" sz="quarter"/>
+            <p:ph type="body" sz="quarter" idx="3"/>
           </p:nvPr>
         </p:nvSpPr>
         <p:spPr/>
@@ -758,7 +777,7 @@
             <a:spLocks noGrp="1"/>
           </p:cNvSpPr>
           <p:nvPr>
-            <p:ph type="sldNum" idx="5" sz="quarter"/>
+            <p:ph type="sldNum" sz="quarter" idx="5"/>
           </p:nvPr>
         </p:nvSpPr>
         <p:spPr/>
@@ -772,7 +791,7 @@
 </file>
 
 <file path=ppt/notesSlides/notesSlide13.xml><?xml version="1.0" encoding="utf-8"?>
-<p:notes xmlns:a="http://schemas.openxmlformats.org/drawingml/2006/main" xmlns:p="http://schemas.openxmlformats.org/presentationml/2006/main" xmlns:r="http://schemas.openxmlformats.org/officeDocument/2006/relationships">
+<p:notes xmlns:a="http://schemas.openxmlformats.org/drawingml/2006/main" xmlns:r="http://schemas.openxmlformats.org/officeDocument/2006/relationships" xmlns:p="http://schemas.openxmlformats.org/presentationml/2006/main">
   <p:cSld>
     <p:spTree>
       <p:nvGrpSpPr>
@@ -792,7 +811,7 @@
         <p:nvSpPr>
           <p:cNvPr id="2" name="Slide Image Placeholder 1"/>
           <p:cNvSpPr>
-            <a:spLocks noGrp="1"/>
+            <a:spLocks noGrp="1" noRot="1" noChangeAspect="1"/>
           </p:cNvSpPr>
           <p:nvPr>
             <p:ph type="sldImg" idx="2"/>
@@ -807,7 +826,7 @@
             <a:spLocks noGrp="1"/>
           </p:cNvSpPr>
           <p:nvPr>
-            <p:ph type="body" idx="3" sz="quarter"/>
+            <p:ph type="body" sz="quarter" idx="3"/>
           </p:nvPr>
         </p:nvSpPr>
         <p:spPr/>
@@ -831,7 +850,7 @@
             <a:spLocks noGrp="1"/>
           </p:cNvSpPr>
           <p:nvPr>
-            <p:ph type="sldNum" idx="5" sz="quarter"/>
+            <p:ph type="sldNum" sz="quarter" idx="5"/>
           </p:nvPr>
         </p:nvSpPr>
         <p:spPr/>
@@ -845,7 +864,7 @@
 </file>
 
 <file path=ppt/notesSlides/notesSlide14.xml><?xml version="1.0" encoding="utf-8"?>
-<p:notes xmlns:a="http://schemas.openxmlformats.org/drawingml/2006/main" xmlns:p="http://schemas.openxmlformats.org/presentationml/2006/main" xmlns:r="http://schemas.openxmlformats.org/officeDocument/2006/relationships">
+<p:notes xmlns:a="http://schemas.openxmlformats.org/drawingml/2006/main" xmlns:r="http://schemas.openxmlformats.org/officeDocument/2006/relationships" xmlns:p="http://schemas.openxmlformats.org/presentationml/2006/main">
   <p:cSld>
     <p:spTree>
       <p:nvGrpSpPr>
@@ -865,7 +884,7 @@
         <p:nvSpPr>
           <p:cNvPr id="2" name="Slide Image Placeholder 1"/>
           <p:cNvSpPr>
-            <a:spLocks noGrp="1"/>
+            <a:spLocks noGrp="1" noRot="1" noChangeAspect="1"/>
           </p:cNvSpPr>
           <p:nvPr>
             <p:ph type="sldImg" idx="2"/>
@@ -880,7 +899,7 @@
             <a:spLocks noGrp="1"/>
           </p:cNvSpPr>
           <p:nvPr>
-            <p:ph type="body" idx="3" sz="quarter"/>
+            <p:ph type="body" sz="quarter" idx="3"/>
           </p:nvPr>
         </p:nvSpPr>
         <p:spPr/>
@@ -904,7 +923,7 @@
             <a:spLocks noGrp="1"/>
           </p:cNvSpPr>
           <p:nvPr>
-            <p:ph type="sldNum" idx="5" sz="quarter"/>
+            <p:ph type="sldNum" sz="quarter" idx="5"/>
           </p:nvPr>
         </p:nvSpPr>
         <p:spPr/>
@@ -918,7 +937,7 @@
 </file>
 
 <file path=ppt/notesSlides/notesSlide15.xml><?xml version="1.0" encoding="utf-8"?>
-<p:notes xmlns:a="http://schemas.openxmlformats.org/drawingml/2006/main" xmlns:p="http://schemas.openxmlformats.org/presentationml/2006/main" xmlns:r="http://schemas.openxmlformats.org/officeDocument/2006/relationships">
+<p:notes xmlns:a="http://schemas.openxmlformats.org/drawingml/2006/main" xmlns:r="http://schemas.openxmlformats.org/officeDocument/2006/relationships" xmlns:p="http://schemas.openxmlformats.org/presentationml/2006/main">
   <p:cSld>
     <p:spTree>
       <p:nvGrpSpPr>
@@ -938,7 +957,7 @@
         <p:nvSpPr>
           <p:cNvPr id="2" name="Slide Image Placeholder 1"/>
           <p:cNvSpPr>
-            <a:spLocks noGrp="1"/>
+            <a:spLocks noGrp="1" noRot="1" noChangeAspect="1"/>
           </p:cNvSpPr>
           <p:nvPr>
             <p:ph type="sldImg" idx="2"/>
@@ -953,7 +972,7 @@
             <a:spLocks noGrp="1"/>
           </p:cNvSpPr>
           <p:nvPr>
-            <p:ph type="body" idx="3" sz="quarter"/>
+            <p:ph type="body" sz="quarter" idx="3"/>
           </p:nvPr>
         </p:nvSpPr>
         <p:spPr/>
@@ -977,7 +996,7 @@
             <a:spLocks noGrp="1"/>
           </p:cNvSpPr>
           <p:nvPr>
-            <p:ph type="sldNum" idx="5" sz="quarter"/>
+            <p:ph type="sldNum" sz="quarter" idx="5"/>
           </p:nvPr>
         </p:nvSpPr>
         <p:spPr/>
@@ -991,7 +1010,7 @@
 </file>
 
 <file path=ppt/notesSlides/notesSlide16.xml><?xml version="1.0" encoding="utf-8"?>
-<p:notes xmlns:a="http://schemas.openxmlformats.org/drawingml/2006/main" xmlns:p="http://schemas.openxmlformats.org/presentationml/2006/main" xmlns:r="http://schemas.openxmlformats.org/officeDocument/2006/relationships">
+<p:notes xmlns:a="http://schemas.openxmlformats.org/drawingml/2006/main" xmlns:r="http://schemas.openxmlformats.org/officeDocument/2006/relationships" xmlns:p="http://schemas.openxmlformats.org/presentationml/2006/main">
   <p:cSld>
     <p:spTree>
       <p:nvGrpSpPr>
@@ -1011,7 +1030,7 @@
         <p:nvSpPr>
           <p:cNvPr id="2" name="Slide Image Placeholder 1"/>
           <p:cNvSpPr>
-            <a:spLocks noGrp="1"/>
+            <a:spLocks noGrp="1" noRot="1" noChangeAspect="1"/>
           </p:cNvSpPr>
           <p:nvPr>
             <p:ph type="sldImg" idx="2"/>
@@ -1026,7 +1045,7 @@
             <a:spLocks noGrp="1"/>
           </p:cNvSpPr>
           <p:nvPr>
-            <p:ph type="body" idx="3" sz="quarter"/>
+            <p:ph type="body" sz="quarter" idx="3"/>
           </p:nvPr>
         </p:nvSpPr>
         <p:spPr/>
@@ -1050,7 +1069,7 @@
             <a:spLocks noGrp="1"/>
           </p:cNvSpPr>
           <p:nvPr>
-            <p:ph type="sldNum" idx="5" sz="quarter"/>
+            <p:ph type="sldNum" sz="quarter" idx="5"/>
           </p:nvPr>
         </p:nvSpPr>
         <p:spPr/>
@@ -1064,7 +1083,7 @@
 </file>
 
 <file path=ppt/notesSlides/notesSlide17.xml><?xml version="1.0" encoding="utf-8"?>
-<p:notes xmlns:a="http://schemas.openxmlformats.org/drawingml/2006/main" xmlns:p="http://schemas.openxmlformats.org/presentationml/2006/main" xmlns:r="http://schemas.openxmlformats.org/officeDocument/2006/relationships">
+<p:notes xmlns:a="http://schemas.openxmlformats.org/drawingml/2006/main" xmlns:r="http://schemas.openxmlformats.org/officeDocument/2006/relationships" xmlns:p="http://schemas.openxmlformats.org/presentationml/2006/main">
   <p:cSld>
     <p:spTree>
       <p:nvGrpSpPr>
@@ -1084,7 +1103,7 @@
         <p:nvSpPr>
           <p:cNvPr id="2" name="Slide Image Placeholder 1"/>
           <p:cNvSpPr>
-            <a:spLocks noGrp="1"/>
+            <a:spLocks noGrp="1" noRot="1" noChangeAspect="1"/>
           </p:cNvSpPr>
           <p:nvPr>
             <p:ph type="sldImg" idx="2"/>
@@ -1099,7 +1118,7 @@
             <a:spLocks noGrp="1"/>
           </p:cNvSpPr>
           <p:nvPr>
-            <p:ph type="body" idx="3" sz="quarter"/>
+            <p:ph type="body" sz="quarter" idx="3"/>
           </p:nvPr>
         </p:nvSpPr>
         <p:spPr/>
@@ -1123,7 +1142,7 @@
             <a:spLocks noGrp="1"/>
           </p:cNvSpPr>
           <p:nvPr>
-            <p:ph type="sldNum" idx="5" sz="quarter"/>
+            <p:ph type="sldNum" sz="quarter" idx="5"/>
           </p:nvPr>
         </p:nvSpPr>
         <p:spPr/>
@@ -1137,7 +1156,7 @@
 </file>
 
 <file path=ppt/notesSlides/notesSlide18.xml><?xml version="1.0" encoding="utf-8"?>
-<p:notes xmlns:a="http://schemas.openxmlformats.org/drawingml/2006/main" xmlns:p="http://schemas.openxmlformats.org/presentationml/2006/main" xmlns:r="http://schemas.openxmlformats.org/officeDocument/2006/relationships">
+<p:notes xmlns:a="http://schemas.openxmlformats.org/drawingml/2006/main" xmlns:r="http://schemas.openxmlformats.org/officeDocument/2006/relationships" xmlns:p="http://schemas.openxmlformats.org/presentationml/2006/main">
   <p:cSld>
     <p:spTree>
       <p:nvGrpSpPr>
@@ -1157,7 +1176,7 @@
         <p:nvSpPr>
           <p:cNvPr id="2" name="Slide Image Placeholder 1"/>
           <p:cNvSpPr>
-            <a:spLocks noGrp="1"/>
+            <a:spLocks noGrp="1" noRot="1" noChangeAspect="1"/>
           </p:cNvSpPr>
           <p:nvPr>
             <p:ph type="sldImg" idx="2"/>
@@ -1172,7 +1191,7 @@
             <a:spLocks noGrp="1"/>
           </p:cNvSpPr>
           <p:nvPr>
-            <p:ph type="body" idx="3" sz="quarter"/>
+            <p:ph type="body" sz="quarter" idx="3"/>
           </p:nvPr>
         </p:nvSpPr>
         <p:spPr/>
@@ -1196,7 +1215,7 @@
             <a:spLocks noGrp="1"/>
           </p:cNvSpPr>
           <p:nvPr>
-            <p:ph type="sldNum" idx="5" sz="quarter"/>
+            <p:ph type="sldNum" sz="quarter" idx="5"/>
           </p:nvPr>
         </p:nvSpPr>
         <p:spPr/>
@@ -1210,7 +1229,7 @@
 </file>
 
 <file path=ppt/notesSlides/notesSlide19.xml><?xml version="1.0" encoding="utf-8"?>
-<p:notes xmlns:a="http://schemas.openxmlformats.org/drawingml/2006/main" xmlns:p="http://schemas.openxmlformats.org/presentationml/2006/main" xmlns:r="http://schemas.openxmlformats.org/officeDocument/2006/relationships">
+<p:notes xmlns:a="http://schemas.openxmlformats.org/drawingml/2006/main" xmlns:r="http://schemas.openxmlformats.org/officeDocument/2006/relationships" xmlns:p="http://schemas.openxmlformats.org/presentationml/2006/main">
   <p:cSld>
     <p:spTree>
       <p:nvGrpSpPr>
@@ -1230,7 +1249,7 @@
         <p:nvSpPr>
           <p:cNvPr id="2" name="Slide Image Placeholder 1"/>
           <p:cNvSpPr>
-            <a:spLocks noGrp="1"/>
+            <a:spLocks noGrp="1" noRot="1" noChangeAspect="1"/>
           </p:cNvSpPr>
           <p:nvPr>
             <p:ph type="sldImg" idx="2"/>
@@ -1245,7 +1264,7 @@
             <a:spLocks noGrp="1"/>
           </p:cNvSpPr>
           <p:nvPr>
-            <p:ph type="body" idx="3" sz="quarter"/>
+            <p:ph type="body" sz="quarter" idx="3"/>
           </p:nvPr>
         </p:nvSpPr>
         <p:spPr/>
@@ -1269,7 +1288,7 @@
             <a:spLocks noGrp="1"/>
           </p:cNvSpPr>
           <p:nvPr>
-            <p:ph type="sldNum" idx="5" sz="quarter"/>
+            <p:ph type="sldNum" sz="quarter" idx="5"/>
           </p:nvPr>
         </p:nvSpPr>
         <p:spPr/>
@@ -1283,7 +1302,7 @@
 </file>
 
 <file path=ppt/notesSlides/notesSlide2.xml><?xml version="1.0" encoding="utf-8"?>
-<p:notes xmlns:a="http://schemas.openxmlformats.org/drawingml/2006/main" xmlns:p="http://schemas.openxmlformats.org/presentationml/2006/main" xmlns:r="http://schemas.openxmlformats.org/officeDocument/2006/relationships">
+<p:notes xmlns:a="http://schemas.openxmlformats.org/drawingml/2006/main" xmlns:r="http://schemas.openxmlformats.org/officeDocument/2006/relationships" xmlns:p="http://schemas.openxmlformats.org/presentationml/2006/main">
   <p:cSld>
     <p:spTree>
       <p:nvGrpSpPr>
@@ -1303,7 +1322,7 @@
         <p:nvSpPr>
           <p:cNvPr id="2" name="Slide Image Placeholder 1"/>
           <p:cNvSpPr>
-            <a:spLocks noGrp="1"/>
+            <a:spLocks noGrp="1" noRot="1" noChangeAspect="1"/>
           </p:cNvSpPr>
           <p:nvPr>
             <p:ph type="sldImg" idx="2"/>
@@ -1318,7 +1337,7 @@
             <a:spLocks noGrp="1"/>
           </p:cNvSpPr>
           <p:nvPr>
-            <p:ph type="body" idx="3" sz="quarter"/>
+            <p:ph type="body" sz="quarter" idx="3"/>
           </p:nvPr>
         </p:nvSpPr>
         <p:spPr/>
@@ -1342,7 +1361,7 @@
             <a:spLocks noGrp="1"/>
           </p:cNvSpPr>
           <p:nvPr>
-            <p:ph type="sldNum" idx="5" sz="quarter"/>
+            <p:ph type="sldNum" sz="quarter" idx="5"/>
           </p:nvPr>
         </p:nvSpPr>
         <p:spPr/>
@@ -1356,7 +1375,7 @@
 </file>
 
 <file path=ppt/notesSlides/notesSlide3.xml><?xml version="1.0" encoding="utf-8"?>
-<p:notes xmlns:a="http://schemas.openxmlformats.org/drawingml/2006/main" xmlns:p="http://schemas.openxmlformats.org/presentationml/2006/main" xmlns:r="http://schemas.openxmlformats.org/officeDocument/2006/relationships">
+<p:notes xmlns:a="http://schemas.openxmlformats.org/drawingml/2006/main" xmlns:r="http://schemas.openxmlformats.org/officeDocument/2006/relationships" xmlns:p="http://schemas.openxmlformats.org/presentationml/2006/main">
   <p:cSld>
     <p:spTree>
       <p:nvGrpSpPr>
@@ -1376,7 +1395,7 @@
         <p:nvSpPr>
           <p:cNvPr id="2" name="Slide Image Placeholder 1"/>
           <p:cNvSpPr>
-            <a:spLocks noGrp="1"/>
+            <a:spLocks noGrp="1" noRot="1" noChangeAspect="1"/>
           </p:cNvSpPr>
           <p:nvPr>
             <p:ph type="sldImg" idx="2"/>
@@ -1391,7 +1410,7 @@
             <a:spLocks noGrp="1"/>
           </p:cNvSpPr>
           <p:nvPr>
-            <p:ph type="body" idx="3" sz="quarter"/>
+            <p:ph type="body" sz="quarter" idx="3"/>
           </p:nvPr>
         </p:nvSpPr>
         <p:spPr/>
@@ -1415,7 +1434,7 @@
             <a:spLocks noGrp="1"/>
           </p:cNvSpPr>
           <p:nvPr>
-            <p:ph type="sldNum" idx="5" sz="quarter"/>
+            <p:ph type="sldNum" sz="quarter" idx="5"/>
           </p:nvPr>
         </p:nvSpPr>
         <p:spPr/>
@@ -1429,7 +1448,7 @@
 </file>
 
 <file path=ppt/notesSlides/notesSlide4.xml><?xml version="1.0" encoding="utf-8"?>
-<p:notes xmlns:a="http://schemas.openxmlformats.org/drawingml/2006/main" xmlns:p="http://schemas.openxmlformats.org/presentationml/2006/main" xmlns:r="http://schemas.openxmlformats.org/officeDocument/2006/relationships">
+<p:notes xmlns:a="http://schemas.openxmlformats.org/drawingml/2006/main" xmlns:r="http://schemas.openxmlformats.org/officeDocument/2006/relationships" xmlns:p="http://schemas.openxmlformats.org/presentationml/2006/main">
   <p:cSld>
     <p:spTree>
       <p:nvGrpSpPr>
@@ -1449,7 +1468,7 @@
         <p:nvSpPr>
           <p:cNvPr id="2" name="Slide Image Placeholder 1"/>
           <p:cNvSpPr>
-            <a:spLocks noGrp="1"/>
+            <a:spLocks noGrp="1" noRot="1" noChangeAspect="1"/>
           </p:cNvSpPr>
           <p:nvPr>
             <p:ph type="sldImg" idx="2"/>
@@ -1464,7 +1483,7 @@
             <a:spLocks noGrp="1"/>
           </p:cNvSpPr>
           <p:nvPr>
-            <p:ph type="body" idx="3" sz="quarter"/>
+            <p:ph type="body" sz="quarter" idx="3"/>
           </p:nvPr>
         </p:nvSpPr>
         <p:spPr/>
@@ -1488,7 +1507,7 @@
             <a:spLocks noGrp="1"/>
           </p:cNvSpPr>
           <p:nvPr>
-            <p:ph type="sldNum" idx="5" sz="quarter"/>
+            <p:ph type="sldNum" sz="quarter" idx="5"/>
           </p:nvPr>
         </p:nvSpPr>
         <p:spPr/>
@@ -1502,7 +1521,7 @@
 </file>
 
 <file path=ppt/notesSlides/notesSlide5.xml><?xml version="1.0" encoding="utf-8"?>
-<p:notes xmlns:a="http://schemas.openxmlformats.org/drawingml/2006/main" xmlns:p="http://schemas.openxmlformats.org/presentationml/2006/main" xmlns:r="http://schemas.openxmlformats.org/officeDocument/2006/relationships">
+<p:notes xmlns:a="http://schemas.openxmlformats.org/drawingml/2006/main" xmlns:r="http://schemas.openxmlformats.org/officeDocument/2006/relationships" xmlns:p="http://schemas.openxmlformats.org/presentationml/2006/main">
   <p:cSld>
     <p:spTree>
       <p:nvGrpSpPr>
@@ -1522,7 +1541,7 @@
         <p:nvSpPr>
           <p:cNvPr id="2" name="Slide Image Placeholder 1"/>
           <p:cNvSpPr>
-            <a:spLocks noGrp="1"/>
+            <a:spLocks noGrp="1" noRot="1" noChangeAspect="1"/>
           </p:cNvSpPr>
           <p:nvPr>
             <p:ph type="sldImg" idx="2"/>
@@ -1537,7 +1556,7 @@
             <a:spLocks noGrp="1"/>
           </p:cNvSpPr>
           <p:nvPr>
-            <p:ph type="body" idx="3" sz="quarter"/>
+            <p:ph type="body" sz="quarter" idx="3"/>
           </p:nvPr>
         </p:nvSpPr>
         <p:spPr/>
@@ -1561,7 +1580,7 @@
             <a:spLocks noGrp="1"/>
           </p:cNvSpPr>
           <p:nvPr>
-            <p:ph type="sldNum" idx="5" sz="quarter"/>
+            <p:ph type="sldNum" sz="quarter" idx="5"/>
           </p:nvPr>
         </p:nvSpPr>
         <p:spPr/>
@@ -1575,7 +1594,7 @@
 </file>
 
 <file path=ppt/notesSlides/notesSlide6.xml><?xml version="1.0" encoding="utf-8"?>
-<p:notes xmlns:a="http://schemas.openxmlformats.org/drawingml/2006/main" xmlns:p="http://schemas.openxmlformats.org/presentationml/2006/main" xmlns:r="http://schemas.openxmlformats.org/officeDocument/2006/relationships">
+<p:notes xmlns:a="http://schemas.openxmlformats.org/drawingml/2006/main" xmlns:r="http://schemas.openxmlformats.org/officeDocument/2006/relationships" xmlns:p="http://schemas.openxmlformats.org/presentationml/2006/main">
   <p:cSld>
     <p:spTree>
       <p:nvGrpSpPr>
@@ -1595,7 +1614,7 @@
         <p:nvSpPr>
           <p:cNvPr id="2" name="Slide Image Placeholder 1"/>
           <p:cNvSpPr>
-            <a:spLocks noGrp="1"/>
+            <a:spLocks noGrp="1" noRot="1" noChangeAspect="1"/>
           </p:cNvSpPr>
           <p:nvPr>
             <p:ph type="sldImg" idx="2"/>
@@ -1610,7 +1629,7 @@
             <a:spLocks noGrp="1"/>
           </p:cNvSpPr>
           <p:nvPr>
-            <p:ph type="body" idx="3" sz="quarter"/>
+            <p:ph type="body" sz="quarter" idx="3"/>
           </p:nvPr>
         </p:nvSpPr>
         <p:spPr/>
@@ -1634,7 +1653,7 @@
             <a:spLocks noGrp="1"/>
           </p:cNvSpPr>
           <p:nvPr>
-            <p:ph type="sldNum" idx="5" sz="quarter"/>
+            <p:ph type="sldNum" sz="quarter" idx="5"/>
           </p:nvPr>
         </p:nvSpPr>
         <p:spPr/>
@@ -1648,7 +1667,7 @@
 </file>
 
 <file path=ppt/notesSlides/notesSlide7.xml><?xml version="1.0" encoding="utf-8"?>
-<p:notes xmlns:a="http://schemas.openxmlformats.org/drawingml/2006/main" xmlns:p="http://schemas.openxmlformats.org/presentationml/2006/main" xmlns:r="http://schemas.openxmlformats.org/officeDocument/2006/relationships">
+<p:notes xmlns:a="http://schemas.openxmlformats.org/drawingml/2006/main" xmlns:r="http://schemas.openxmlformats.org/officeDocument/2006/relationships" xmlns:p="http://schemas.openxmlformats.org/presentationml/2006/main">
   <p:cSld>
     <p:spTree>
       <p:nvGrpSpPr>
@@ -1668,7 +1687,7 @@
         <p:nvSpPr>
           <p:cNvPr id="2" name="Slide Image Placeholder 1"/>
           <p:cNvSpPr>
-            <a:spLocks noGrp="1"/>
+            <a:spLocks noGrp="1" noRot="1" noChangeAspect="1"/>
           </p:cNvSpPr>
           <p:nvPr>
             <p:ph type="sldImg" idx="2"/>
@@ -1683,7 +1702,7 @@
             <a:spLocks noGrp="1"/>
           </p:cNvSpPr>
           <p:nvPr>
-            <p:ph type="body" idx="3" sz="quarter"/>
+            <p:ph type="body" sz="quarter" idx="3"/>
           </p:nvPr>
         </p:nvSpPr>
         <p:spPr/>
@@ -1707,7 +1726,7 @@
             <a:spLocks noGrp="1"/>
           </p:cNvSpPr>
           <p:nvPr>
-            <p:ph type="sldNum" idx="5" sz="quarter"/>
+            <p:ph type="sldNum" sz="quarter" idx="5"/>
           </p:nvPr>
         </p:nvSpPr>
         <p:spPr/>
@@ -1721,7 +1740,7 @@
 </file>
 
 <file path=ppt/notesSlides/notesSlide8.xml><?xml version="1.0" encoding="utf-8"?>
-<p:notes xmlns:a="http://schemas.openxmlformats.org/drawingml/2006/main" xmlns:p="http://schemas.openxmlformats.org/presentationml/2006/main" xmlns:r="http://schemas.openxmlformats.org/officeDocument/2006/relationships">
+<p:notes xmlns:a="http://schemas.openxmlformats.org/drawingml/2006/main" xmlns:r="http://schemas.openxmlformats.org/officeDocument/2006/relationships" xmlns:p="http://schemas.openxmlformats.org/presentationml/2006/main">
   <p:cSld>
     <p:spTree>
       <p:nvGrpSpPr>
@@ -1741,7 +1760,7 @@
         <p:nvSpPr>
           <p:cNvPr id="2" name="Slide Image Placeholder 1"/>
           <p:cNvSpPr>
-            <a:spLocks noGrp="1"/>
+            <a:spLocks noGrp="1" noRot="1" noChangeAspect="1"/>
           </p:cNvSpPr>
           <p:nvPr>
             <p:ph type="sldImg" idx="2"/>
@@ -1756,7 +1775,7 @@
             <a:spLocks noGrp="1"/>
           </p:cNvSpPr>
           <p:nvPr>
-            <p:ph type="body" idx="3" sz="quarter"/>
+            <p:ph type="body" sz="quarter" idx="3"/>
           </p:nvPr>
         </p:nvSpPr>
         <p:spPr/>
@@ -1780,7 +1799,7 @@
             <a:spLocks noGrp="1"/>
           </p:cNvSpPr>
           <p:nvPr>
-            <p:ph type="sldNum" idx="5" sz="quarter"/>
+            <p:ph type="sldNum" sz="quarter" idx="5"/>
           </p:nvPr>
         </p:nvSpPr>
         <p:spPr/>
@@ -1794,7 +1813,7 @@
 </file>
 
 <file path=ppt/notesSlides/notesSlide9.xml><?xml version="1.0" encoding="utf-8"?>
-<p:notes xmlns:a="http://schemas.openxmlformats.org/drawingml/2006/main" xmlns:p="http://schemas.openxmlformats.org/presentationml/2006/main" xmlns:r="http://schemas.openxmlformats.org/officeDocument/2006/relationships">
+<p:notes xmlns:a="http://schemas.openxmlformats.org/drawingml/2006/main" xmlns:r="http://schemas.openxmlformats.org/officeDocument/2006/relationships" xmlns:p="http://schemas.openxmlformats.org/presentationml/2006/main">
   <p:cSld>
     <p:spTree>
       <p:nvGrpSpPr>
@@ -1814,7 +1833,7 @@
         <p:nvSpPr>
           <p:cNvPr id="2" name="Slide Image Placeholder 1"/>
           <p:cNvSpPr>
-            <a:spLocks noGrp="1"/>
+            <a:spLocks noGrp="1" noRot="1" noChangeAspect="1"/>
           </p:cNvSpPr>
           <p:nvPr>
             <p:ph type="sldImg" idx="2"/>
@@ -1829,7 +1848,7 @@
             <a:spLocks noGrp="1"/>
           </p:cNvSpPr>
           <p:nvPr>
-            <p:ph type="body" idx="3" sz="quarter"/>
+            <p:ph type="body" sz="quarter" idx="3"/>
           </p:nvPr>
         </p:nvSpPr>
         <p:spPr/>
@@ -1853,7 +1872,7 @@
             <a:spLocks noGrp="1"/>
           </p:cNvSpPr>
           <p:nvPr>
-            <p:ph type="sldNum" idx="5" sz="quarter"/>
+            <p:ph type="sldNum" sz="quarter" idx="5"/>
           </p:nvPr>
         </p:nvSpPr>
         <p:spPr/>
@@ -1904,10 +1923,9 @@
           <a:lstStyle/>
           <a:p>
             <a:r>
-              <a:rPr lang="en-US" smtClean="0"/>
+              <a:rPr lang="en-US"/>
               <a:t>Click to edit Master title style</a:t>
             </a:r>
-            <a:endParaRPr lang="en-US"/>
           </a:p>
         </p:txBody>
       </p:sp>
@@ -2023,10 +2041,9 @@
           </a:lstStyle>
           <a:p>
             <a:r>
-              <a:rPr lang="en-US" smtClean="0"/>
+              <a:rPr lang="en-US"/>
               <a:t>Click to edit Master subtitle style</a:t>
             </a:r>
-            <a:endParaRPr lang="en-US"/>
           </a:p>
         </p:txBody>
       </p:sp>
@@ -2047,7 +2064,7 @@
           <a:p>
             <a:fld id="{5BCAD085-E8A6-8845-BD4E-CB4CCA059FC4}" type="datetimeFigureOut">
               <a:rPr lang="en-US" smtClean="0"/>
-              <a:t>1/27/13</a:t>
+              <a:t>5/14/26</a:t>
             </a:fld>
             <a:endParaRPr lang="en-US"/>
           </a:p>
@@ -2141,10 +2158,9 @@
           <a:lstStyle/>
           <a:p>
             <a:r>
-              <a:rPr lang="en-US" smtClean="0"/>
+              <a:rPr lang="en-US"/>
               <a:t>Click to edit Master title style</a:t>
             </a:r>
-            <a:endParaRPr lang="en-US"/>
           </a:p>
         </p:txBody>
       </p:sp>
@@ -2165,38 +2181,37 @@
           <a:p>
             <a:pPr lvl="0"/>
             <a:r>
-              <a:rPr lang="en-US" smtClean="0"/>
+              <a:rPr lang="en-US"/>
               <a:t>Click to edit Master text styles</a:t>
             </a:r>
           </a:p>
           <a:p>
             <a:pPr lvl="1"/>
             <a:r>
-              <a:rPr lang="en-US" smtClean="0"/>
+              <a:rPr lang="en-US"/>
               <a:t>Second level</a:t>
             </a:r>
           </a:p>
           <a:p>
             <a:pPr lvl="2"/>
             <a:r>
-              <a:rPr lang="en-US" smtClean="0"/>
+              <a:rPr lang="en-US"/>
               <a:t>Third level</a:t>
             </a:r>
           </a:p>
           <a:p>
             <a:pPr lvl="3"/>
             <a:r>
-              <a:rPr lang="en-US" smtClean="0"/>
+              <a:rPr lang="en-US"/>
               <a:t>Fourth level</a:t>
             </a:r>
           </a:p>
           <a:p>
             <a:pPr lvl="4"/>
             <a:r>
-              <a:rPr lang="en-US" smtClean="0"/>
+              <a:rPr lang="en-US"/>
               <a:t>Fifth level</a:t>
             </a:r>
-            <a:endParaRPr lang="en-US"/>
           </a:p>
         </p:txBody>
       </p:sp>
@@ -2217,7 +2232,7 @@
           <a:p>
             <a:fld id="{5BCAD085-E8A6-8845-BD4E-CB4CCA059FC4}" type="datetimeFigureOut">
               <a:rPr lang="en-US" smtClean="0"/>
-              <a:t>1/27/13</a:t>
+              <a:t>5/14/26</a:t>
             </a:fld>
             <a:endParaRPr lang="en-US"/>
           </a:p>
@@ -2316,10 +2331,9 @@
           <a:lstStyle/>
           <a:p>
             <a:r>
-              <a:rPr lang="en-US" smtClean="0"/>
+              <a:rPr lang="en-US"/>
               <a:t>Click to edit Master title style</a:t>
             </a:r>
-            <a:endParaRPr lang="en-US"/>
           </a:p>
         </p:txBody>
       </p:sp>
@@ -2345,38 +2359,37 @@
           <a:p>
             <a:pPr lvl="0"/>
             <a:r>
-              <a:rPr lang="en-US" smtClean="0"/>
+              <a:rPr lang="en-US"/>
               <a:t>Click to edit Master text styles</a:t>
             </a:r>
           </a:p>
           <a:p>
             <a:pPr lvl="1"/>
             <a:r>
-              <a:rPr lang="en-US" smtClean="0"/>
+              <a:rPr lang="en-US"/>
               <a:t>Second level</a:t>
             </a:r>
           </a:p>
           <a:p>
             <a:pPr lvl="2"/>
             <a:r>
-              <a:rPr lang="en-US" smtClean="0"/>
+              <a:rPr lang="en-US"/>
               <a:t>Third level</a:t>
             </a:r>
           </a:p>
           <a:p>
             <a:pPr lvl="3"/>
             <a:r>
-              <a:rPr lang="en-US" smtClean="0"/>
+              <a:rPr lang="en-US"/>
               <a:t>Fourth level</a:t>
             </a:r>
           </a:p>
           <a:p>
             <a:pPr lvl="4"/>
             <a:r>
-              <a:rPr lang="en-US" smtClean="0"/>
+              <a:rPr lang="en-US"/>
               <a:t>Fifth level</a:t>
             </a:r>
-            <a:endParaRPr lang="en-US"/>
           </a:p>
         </p:txBody>
       </p:sp>
@@ -2397,7 +2410,7 @@
           <a:p>
             <a:fld id="{5BCAD085-E8A6-8845-BD4E-CB4CCA059FC4}" type="datetimeFigureOut">
               <a:rPr lang="en-US" smtClean="0"/>
-              <a:t>1/27/13</a:t>
+              <a:t>5/14/26</a:t>
             </a:fld>
             <a:endParaRPr lang="en-US"/>
           </a:p>
@@ -2491,10 +2504,9 @@
           <a:lstStyle/>
           <a:p>
             <a:r>
-              <a:rPr lang="en-US" smtClean="0"/>
+              <a:rPr lang="en-US"/>
               <a:t>Click to edit Master title style</a:t>
             </a:r>
-            <a:endParaRPr lang="en-US"/>
           </a:p>
         </p:txBody>
       </p:sp>
@@ -2515,38 +2527,37 @@
           <a:p>
             <a:pPr lvl="0"/>
             <a:r>
-              <a:rPr lang="en-US" smtClean="0"/>
+              <a:rPr lang="en-US"/>
               <a:t>Click to edit Master text styles</a:t>
             </a:r>
           </a:p>
           <a:p>
             <a:pPr lvl="1"/>
             <a:r>
-              <a:rPr lang="en-US" smtClean="0"/>
+              <a:rPr lang="en-US"/>
               <a:t>Second level</a:t>
             </a:r>
           </a:p>
           <a:p>
             <a:pPr lvl="2"/>
             <a:r>
-              <a:rPr lang="en-US" smtClean="0"/>
+              <a:rPr lang="en-US"/>
               <a:t>Third level</a:t>
             </a:r>
           </a:p>
           <a:p>
             <a:pPr lvl="3"/>
             <a:r>
-              <a:rPr lang="en-US" smtClean="0"/>
+              <a:rPr lang="en-US"/>
               <a:t>Fourth level</a:t>
             </a:r>
           </a:p>
           <a:p>
             <a:pPr lvl="4"/>
             <a:r>
-              <a:rPr lang="en-US" smtClean="0"/>
+              <a:rPr lang="en-US"/>
               <a:t>Fifth level</a:t>
             </a:r>
-            <a:endParaRPr lang="en-US"/>
           </a:p>
         </p:txBody>
       </p:sp>
@@ -2567,7 +2578,7 @@
           <a:p>
             <a:fld id="{5BCAD085-E8A6-8845-BD4E-CB4CCA059FC4}" type="datetimeFigureOut">
               <a:rPr lang="en-US" smtClean="0"/>
-              <a:t>1/27/13</a:t>
+              <a:t>5/14/26</a:t>
             </a:fld>
             <a:endParaRPr lang="en-US"/>
           </a:p>
@@ -2670,10 +2681,9 @@
           </a:lstStyle>
           <a:p>
             <a:r>
-              <a:rPr lang="en-US" smtClean="0"/>
+              <a:rPr lang="en-US"/>
               <a:t>Click to edit Master title style</a:t>
             </a:r>
-            <a:endParaRPr lang="en-US"/>
           </a:p>
         </p:txBody>
       </p:sp>
@@ -2790,7 +2800,7 @@
           <a:p>
             <a:pPr lvl="0"/>
             <a:r>
-              <a:rPr lang="en-US" smtClean="0"/>
+              <a:rPr lang="en-US"/>
               <a:t>Click to edit Master text styles</a:t>
             </a:r>
           </a:p>
@@ -2813,7 +2823,7 @@
           <a:p>
             <a:fld id="{5BCAD085-E8A6-8845-BD4E-CB4CCA059FC4}" type="datetimeFigureOut">
               <a:rPr lang="en-US" smtClean="0"/>
-              <a:t>1/27/13</a:t>
+              <a:t>5/14/26</a:t>
             </a:fld>
             <a:endParaRPr lang="en-US"/>
           </a:p>
@@ -2907,10 +2917,9 @@
           <a:lstStyle/>
           <a:p>
             <a:r>
-              <a:rPr lang="en-US" smtClean="0"/>
+              <a:rPr lang="en-US"/>
               <a:t>Click to edit Master title style</a:t>
             </a:r>
-            <a:endParaRPr lang="en-US"/>
           </a:p>
         </p:txBody>
       </p:sp>
@@ -2964,38 +2973,37 @@
           <a:p>
             <a:pPr lvl="0"/>
             <a:r>
-              <a:rPr lang="en-US" smtClean="0"/>
+              <a:rPr lang="en-US"/>
               <a:t>Click to edit Master text styles</a:t>
             </a:r>
           </a:p>
           <a:p>
             <a:pPr lvl="1"/>
             <a:r>
-              <a:rPr lang="en-US" smtClean="0"/>
+              <a:rPr lang="en-US"/>
               <a:t>Second level</a:t>
             </a:r>
           </a:p>
           <a:p>
             <a:pPr lvl="2"/>
             <a:r>
-              <a:rPr lang="en-US" smtClean="0"/>
+              <a:rPr lang="en-US"/>
               <a:t>Third level</a:t>
             </a:r>
           </a:p>
           <a:p>
             <a:pPr lvl="3"/>
             <a:r>
-              <a:rPr lang="en-US" smtClean="0"/>
+              <a:rPr lang="en-US"/>
               <a:t>Fourth level</a:t>
             </a:r>
           </a:p>
           <a:p>
             <a:pPr lvl="4"/>
             <a:r>
-              <a:rPr lang="en-US" smtClean="0"/>
+              <a:rPr lang="en-US"/>
               <a:t>Fifth level</a:t>
             </a:r>
-            <a:endParaRPr lang="en-US"/>
           </a:p>
         </p:txBody>
       </p:sp>
@@ -3049,38 +3057,37 @@
           <a:p>
             <a:pPr lvl="0"/>
             <a:r>
-              <a:rPr lang="en-US" smtClean="0"/>
+              <a:rPr lang="en-US"/>
               <a:t>Click to edit Master text styles</a:t>
             </a:r>
           </a:p>
           <a:p>
             <a:pPr lvl="1"/>
             <a:r>
-              <a:rPr lang="en-US" smtClean="0"/>
+              <a:rPr lang="en-US"/>
               <a:t>Second level</a:t>
             </a:r>
           </a:p>
           <a:p>
             <a:pPr lvl="2"/>
             <a:r>
-              <a:rPr lang="en-US" smtClean="0"/>
+              <a:rPr lang="en-US"/>
               <a:t>Third level</a:t>
             </a:r>
           </a:p>
           <a:p>
             <a:pPr lvl="3"/>
             <a:r>
-              <a:rPr lang="en-US" smtClean="0"/>
+              <a:rPr lang="en-US"/>
               <a:t>Fourth level</a:t>
             </a:r>
           </a:p>
           <a:p>
             <a:pPr lvl="4"/>
             <a:r>
-              <a:rPr lang="en-US" smtClean="0"/>
+              <a:rPr lang="en-US"/>
               <a:t>Fifth level</a:t>
             </a:r>
-            <a:endParaRPr lang="en-US"/>
           </a:p>
         </p:txBody>
       </p:sp>
@@ -3101,7 +3108,7 @@
           <a:p>
             <a:fld id="{5BCAD085-E8A6-8845-BD4E-CB4CCA059FC4}" type="datetimeFigureOut">
               <a:rPr lang="en-US" smtClean="0"/>
-              <a:t>1/27/13</a:t>
+              <a:t>5/14/26</a:t>
             </a:fld>
             <a:endParaRPr lang="en-US"/>
           </a:p>
@@ -3199,10 +3206,9 @@
           </a:lstStyle>
           <a:p>
             <a:r>
-              <a:rPr lang="en-US" smtClean="0"/>
+              <a:rPr lang="en-US"/>
               <a:t>Click to edit Master title style</a:t>
             </a:r>
-            <a:endParaRPr lang="en-US"/>
           </a:p>
         </p:txBody>
       </p:sp>
@@ -3265,7 +3271,7 @@
           <a:p>
             <a:pPr lvl="0"/>
             <a:r>
-              <a:rPr lang="en-US" smtClean="0"/>
+              <a:rPr lang="en-US"/>
               <a:t>Click to edit Master text styles</a:t>
             </a:r>
           </a:p>
@@ -3321,38 +3327,37 @@
           <a:p>
             <a:pPr lvl="0"/>
             <a:r>
-              <a:rPr lang="en-US" smtClean="0"/>
+              <a:rPr lang="en-US"/>
               <a:t>Click to edit Master text styles</a:t>
             </a:r>
           </a:p>
           <a:p>
             <a:pPr lvl="1"/>
             <a:r>
-              <a:rPr lang="en-US" smtClean="0"/>
+              <a:rPr lang="en-US"/>
               <a:t>Second level</a:t>
             </a:r>
           </a:p>
           <a:p>
             <a:pPr lvl="2"/>
             <a:r>
-              <a:rPr lang="en-US" smtClean="0"/>
+              <a:rPr lang="en-US"/>
               <a:t>Third level</a:t>
             </a:r>
           </a:p>
           <a:p>
             <a:pPr lvl="3"/>
             <a:r>
-              <a:rPr lang="en-US" smtClean="0"/>
+              <a:rPr lang="en-US"/>
               <a:t>Fourth level</a:t>
             </a:r>
           </a:p>
           <a:p>
             <a:pPr lvl="4"/>
             <a:r>
-              <a:rPr lang="en-US" smtClean="0"/>
+              <a:rPr lang="en-US"/>
               <a:t>Fifth level</a:t>
             </a:r>
-            <a:endParaRPr lang="en-US"/>
           </a:p>
         </p:txBody>
       </p:sp>
@@ -3415,7 +3420,7 @@
           <a:p>
             <a:pPr lvl="0"/>
             <a:r>
-              <a:rPr lang="en-US" smtClean="0"/>
+              <a:rPr lang="en-US"/>
               <a:t>Click to edit Master text styles</a:t>
             </a:r>
           </a:p>
@@ -3471,38 +3476,37 @@
           <a:p>
             <a:pPr lvl="0"/>
             <a:r>
-              <a:rPr lang="en-US" smtClean="0"/>
+              <a:rPr lang="en-US"/>
               <a:t>Click to edit Master text styles</a:t>
             </a:r>
           </a:p>
           <a:p>
             <a:pPr lvl="1"/>
             <a:r>
-              <a:rPr lang="en-US" smtClean="0"/>
+              <a:rPr lang="en-US"/>
               <a:t>Second level</a:t>
             </a:r>
           </a:p>
           <a:p>
             <a:pPr lvl="2"/>
             <a:r>
-              <a:rPr lang="en-US" smtClean="0"/>
+              <a:rPr lang="en-US"/>
               <a:t>Third level</a:t>
             </a:r>
           </a:p>
           <a:p>
             <a:pPr lvl="3"/>
             <a:r>
-              <a:rPr lang="en-US" smtClean="0"/>
+              <a:rPr lang="en-US"/>
               <a:t>Fourth level</a:t>
             </a:r>
           </a:p>
           <a:p>
             <a:pPr lvl="4"/>
             <a:r>
-              <a:rPr lang="en-US" smtClean="0"/>
+              <a:rPr lang="en-US"/>
               <a:t>Fifth level</a:t>
             </a:r>
-            <a:endParaRPr lang="en-US"/>
           </a:p>
         </p:txBody>
       </p:sp>
@@ -3523,7 +3527,7 @@
           <a:p>
             <a:fld id="{5BCAD085-E8A6-8845-BD4E-CB4CCA059FC4}" type="datetimeFigureOut">
               <a:rPr lang="en-US" smtClean="0"/>
-              <a:t>1/27/13</a:t>
+              <a:t>5/14/26</a:t>
             </a:fld>
             <a:endParaRPr lang="en-US"/>
           </a:p>
@@ -3617,10 +3621,9 @@
           <a:lstStyle/>
           <a:p>
             <a:r>
-              <a:rPr lang="en-US" smtClean="0"/>
+              <a:rPr lang="en-US"/>
               <a:t>Click to edit Master title style</a:t>
             </a:r>
-            <a:endParaRPr lang="en-US"/>
           </a:p>
         </p:txBody>
       </p:sp>
@@ -3641,7 +3644,7 @@
           <a:p>
             <a:fld id="{5BCAD085-E8A6-8845-BD4E-CB4CCA059FC4}" type="datetimeFigureOut">
               <a:rPr lang="en-US" smtClean="0"/>
-              <a:t>1/27/13</a:t>
+              <a:t>5/14/26</a:t>
             </a:fld>
             <a:endParaRPr lang="en-US"/>
           </a:p>
@@ -3736,7 +3739,7 @@
           <a:p>
             <a:fld id="{5BCAD085-E8A6-8845-BD4E-CB4CCA059FC4}" type="datetimeFigureOut">
               <a:rPr lang="en-US" smtClean="0"/>
-              <a:t>1/27/13</a:t>
+              <a:t>5/14/26</a:t>
             </a:fld>
             <a:endParaRPr lang="en-US"/>
           </a:p>
@@ -3839,10 +3842,9 @@
           </a:lstStyle>
           <a:p>
             <a:r>
-              <a:rPr lang="en-US" smtClean="0"/>
+              <a:rPr lang="en-US"/>
               <a:t>Click to edit Master title style</a:t>
             </a:r>
-            <a:endParaRPr lang="en-US"/>
           </a:p>
         </p:txBody>
       </p:sp>
@@ -3896,38 +3898,37 @@
           <a:p>
             <a:pPr lvl="0"/>
             <a:r>
-              <a:rPr lang="en-US" smtClean="0"/>
+              <a:rPr lang="en-US"/>
               <a:t>Click to edit Master text styles</a:t>
             </a:r>
           </a:p>
           <a:p>
             <a:pPr lvl="1"/>
             <a:r>
-              <a:rPr lang="en-US" smtClean="0"/>
+              <a:rPr lang="en-US"/>
               <a:t>Second level</a:t>
             </a:r>
           </a:p>
           <a:p>
             <a:pPr lvl="2"/>
             <a:r>
-              <a:rPr lang="en-US" smtClean="0"/>
+              <a:rPr lang="en-US"/>
               <a:t>Third level</a:t>
             </a:r>
           </a:p>
           <a:p>
             <a:pPr lvl="3"/>
             <a:r>
-              <a:rPr lang="en-US" smtClean="0"/>
+              <a:rPr lang="en-US"/>
               <a:t>Fourth level</a:t>
             </a:r>
           </a:p>
           <a:p>
             <a:pPr lvl="4"/>
             <a:r>
-              <a:rPr lang="en-US" smtClean="0"/>
+              <a:rPr lang="en-US"/>
               <a:t>Fifth level</a:t>
             </a:r>
-            <a:endParaRPr lang="en-US"/>
           </a:p>
         </p:txBody>
       </p:sp>
@@ -3990,7 +3991,7 @@
           <a:p>
             <a:pPr lvl="0"/>
             <a:r>
-              <a:rPr lang="en-US" smtClean="0"/>
+              <a:rPr lang="en-US"/>
               <a:t>Click to edit Master text styles</a:t>
             </a:r>
           </a:p>
@@ -4013,7 +4014,7 @@
           <a:p>
             <a:fld id="{5BCAD085-E8A6-8845-BD4E-CB4CCA059FC4}" type="datetimeFigureOut">
               <a:rPr lang="en-US" smtClean="0"/>
-              <a:t>1/27/13</a:t>
+              <a:t>5/14/26</a:t>
             </a:fld>
             <a:endParaRPr lang="en-US"/>
           </a:p>
@@ -4116,10 +4117,9 @@
           </a:lstStyle>
           <a:p>
             <a:r>
-              <a:rPr lang="en-US" smtClean="0"/>
+              <a:rPr lang="en-US"/>
               <a:t>Click to edit Master title style</a:t>
             </a:r>
-            <a:endParaRPr lang="en-US"/>
           </a:p>
         </p:txBody>
       </p:sp>
@@ -4243,7 +4243,7 @@
           <a:p>
             <a:pPr lvl="0"/>
             <a:r>
-              <a:rPr lang="en-US" smtClean="0"/>
+              <a:rPr lang="en-US"/>
               <a:t>Click to edit Master text styles</a:t>
             </a:r>
           </a:p>
@@ -4266,7 +4266,7 @@
           <a:p>
             <a:fld id="{5BCAD085-E8A6-8845-BD4E-CB4CCA059FC4}" type="datetimeFigureOut">
               <a:rPr lang="en-US" smtClean="0"/>
-              <a:t>1/27/13</a:t>
+              <a:t>5/14/26</a:t>
             </a:fld>
             <a:endParaRPr lang="en-US"/>
           </a:p>
@@ -4375,10 +4375,9 @@
           <a:lstStyle/>
           <a:p>
             <a:r>
-              <a:rPr lang="en-US" smtClean="0"/>
+              <a:rPr lang="en-US"/>
               <a:t>Click to edit Master title style</a:t>
             </a:r>
-            <a:endParaRPr lang="en-US"/>
           </a:p>
         </p:txBody>
       </p:sp>
@@ -4409,38 +4408,37 @@
           <a:p>
             <a:pPr lvl="0"/>
             <a:r>
-              <a:rPr lang="en-US" smtClean="0"/>
+              <a:rPr lang="en-US"/>
               <a:t>Click to edit Master text styles</a:t>
             </a:r>
           </a:p>
           <a:p>
             <a:pPr lvl="1"/>
             <a:r>
-              <a:rPr lang="en-US" smtClean="0"/>
+              <a:rPr lang="en-US"/>
               <a:t>Second level</a:t>
             </a:r>
           </a:p>
           <a:p>
             <a:pPr lvl="2"/>
             <a:r>
-              <a:rPr lang="en-US" smtClean="0"/>
+              <a:rPr lang="en-US"/>
               <a:t>Third level</a:t>
             </a:r>
           </a:p>
           <a:p>
             <a:pPr lvl="3"/>
             <a:r>
-              <a:rPr lang="en-US" smtClean="0"/>
+              <a:rPr lang="en-US"/>
               <a:t>Fourth level</a:t>
             </a:r>
           </a:p>
           <a:p>
             <a:pPr lvl="4"/>
             <a:r>
-              <a:rPr lang="en-US" smtClean="0"/>
+              <a:rPr lang="en-US"/>
               <a:t>Fifth level</a:t>
             </a:r>
-            <a:endParaRPr lang="en-US"/>
           </a:p>
         </p:txBody>
       </p:sp>
@@ -4479,7 +4477,7 @@
           <a:p>
             <a:fld id="{5BCAD085-E8A6-8845-BD4E-CB4CCA059FC4}" type="datetimeFigureOut">
               <a:rPr lang="en-US" smtClean="0"/>
-              <a:t>1/27/13</a:t>
+              <a:t>5/14/26</a:t>
             </a:fld>
             <a:endParaRPr lang="en-US"/>
           </a:p>
@@ -4838,7 +4836,7 @@
 </file>
 
 <file path=ppt/slides/slide1.xml><?xml version="1.0" encoding="utf-8"?>
-<p:sld xmlns:a="http://schemas.openxmlformats.org/drawingml/2006/main" xmlns:p="http://schemas.openxmlformats.org/presentationml/2006/main" xmlns:r="http://schemas.openxmlformats.org/officeDocument/2006/relationships">
+<p:sld xmlns:a="http://schemas.openxmlformats.org/drawingml/2006/main" xmlns:r="http://schemas.openxmlformats.org/officeDocument/2006/relationships" xmlns:p="http://schemas.openxmlformats.org/presentationml/2006/main">
   <p:cSld>
     <p:bg>
       <p:bgPr>
@@ -4854,7 +4852,14 @@
         <p:cNvGrpSpPr/>
         <p:nvPr/>
       </p:nvGrpSpPr>
-      <p:grpSpPr/>
+      <p:grpSpPr>
+        <a:xfrm>
+          <a:off x="0" y="0"/>
+          <a:ext cx="0" cy="0"/>
+          <a:chOff x="0" y="0"/>
+          <a:chExt cx="0" cy="0"/>
+        </a:xfrm>
+      </p:grpSpPr>
       <p:sp>
         <p:nvSpPr>
           <p:cNvPr id="2" name="TextBox 1"/>
@@ -4932,6 +4937,7 @@
           <a:lstStyle/>
           <a:p>
             <a:pPr algn="ctr"/>
+            <a:endParaRPr/>
           </a:p>
         </p:txBody>
       </p:sp>
@@ -5002,10 +5008,12 @@
             <a:pPr>
               <a:buNone/>
             </a:pPr>
-            <a:r>
-              <a:rPr sz="400"/>
-              <a:t/>
-            </a:r>
+            <a:endParaRPr sz="2100" b="1" i="0">
+              <a:solidFill>
+                <a:srgbClr val="1A1A2E"/>
+              </a:solidFill>
+              <a:latin typeface="Helvetica Neue"/>
+            </a:endParaRPr>
           </a:p>
           <a:p>
             <a:pPr algn="l">
@@ -5025,10 +5033,12 @@
             <a:pPr>
               <a:buNone/>
             </a:pPr>
-            <a:r>
-              <a:rPr sz="400"/>
-              <a:t/>
-            </a:r>
+            <a:endParaRPr sz="2000" b="0" i="0">
+              <a:solidFill>
+                <a:srgbClr val="222222"/>
+              </a:solidFill>
+              <a:latin typeface="Helvetica Neue"/>
+            </a:endParaRPr>
           </a:p>
           <a:p>
             <a:pPr algn="l">
@@ -5092,7 +5102,7 @@
 </file>
 
 <file path=ppt/slides/slide10.xml><?xml version="1.0" encoding="utf-8"?>
-<p:sld xmlns:a="http://schemas.openxmlformats.org/drawingml/2006/main" xmlns:p="http://schemas.openxmlformats.org/presentationml/2006/main" xmlns:r="http://schemas.openxmlformats.org/officeDocument/2006/relationships">
+<p:sld xmlns:a="http://schemas.openxmlformats.org/drawingml/2006/main" xmlns:r="http://schemas.openxmlformats.org/officeDocument/2006/relationships" xmlns:p="http://schemas.openxmlformats.org/presentationml/2006/main">
   <p:cSld>
     <p:bg>
       <p:bgPr>
@@ -5108,7 +5118,14 @@
         <p:cNvGrpSpPr/>
         <p:nvPr/>
       </p:nvGrpSpPr>
-      <p:grpSpPr/>
+      <p:grpSpPr>
+        <a:xfrm>
+          <a:off x="0" y="0"/>
+          <a:ext cx="0" cy="0"/>
+          <a:chOff x="0" y="0"/>
+          <a:chExt cx="0" cy="0"/>
+        </a:xfrm>
+      </p:grpSpPr>
       <p:sp>
         <p:nvSpPr>
           <p:cNvPr id="2" name="TextBox 1"/>
@@ -5186,6 +5203,7 @@
           <a:lstStyle/>
           <a:p>
             <a:pPr algn="ctr"/>
+            <a:endParaRPr/>
           </a:p>
         </p:txBody>
       </p:sp>
@@ -5228,10 +5246,12 @@
             <a:pPr>
               <a:buNone/>
             </a:pPr>
-            <a:r>
-              <a:rPr sz="400"/>
-              <a:t/>
-            </a:r>
+            <a:endParaRPr sz="1800" b="0" i="0">
+              <a:solidFill>
+                <a:srgbClr val="222222"/>
+              </a:solidFill>
+              <a:latin typeface="Helvetica Neue"/>
+            </a:endParaRPr>
           </a:p>
           <a:p>
             <a:pPr algn="l">
@@ -5260,10 +5280,12 @@
             <a:pPr>
               <a:buNone/>
             </a:pPr>
-            <a:r>
-              <a:rPr sz="400"/>
-              <a:t/>
-            </a:r>
+            <a:endParaRPr sz="1800" b="0" i="0">
+              <a:solidFill>
+                <a:srgbClr val="222222"/>
+              </a:solidFill>
+              <a:latin typeface="Helvetica Neue"/>
+            </a:endParaRPr>
           </a:p>
           <a:p>
             <a:pPr algn="l">
@@ -5292,10 +5314,12 @@
             <a:pPr>
               <a:buNone/>
             </a:pPr>
-            <a:r>
-              <a:rPr sz="400"/>
-              <a:t/>
-            </a:r>
+            <a:endParaRPr sz="1800" b="0" i="0">
+              <a:solidFill>
+                <a:srgbClr val="222222"/>
+              </a:solidFill>
+              <a:latin typeface="Helvetica Neue"/>
+            </a:endParaRPr>
           </a:p>
           <a:p>
             <a:pPr algn="l">
@@ -5324,10 +5348,12 @@
             <a:pPr>
               <a:buNone/>
             </a:pPr>
-            <a:r>
-              <a:rPr sz="400"/>
-              <a:t/>
-            </a:r>
+            <a:endParaRPr sz="1800" b="0" i="0">
+              <a:solidFill>
+                <a:srgbClr val="222222"/>
+              </a:solidFill>
+              <a:latin typeface="Helvetica Neue"/>
+            </a:endParaRPr>
           </a:p>
           <a:p>
             <a:pPr algn="l">
@@ -5356,10 +5382,12 @@
             <a:pPr>
               <a:buNone/>
             </a:pPr>
-            <a:r>
-              <a:rPr sz="400"/>
-              <a:t/>
-            </a:r>
+            <a:endParaRPr sz="1800" b="0" i="0">
+              <a:solidFill>
+                <a:srgbClr val="222222"/>
+              </a:solidFill>
+              <a:latin typeface="Helvetica Neue"/>
+            </a:endParaRPr>
           </a:p>
           <a:p>
             <a:pPr algn="l">
@@ -5388,10 +5416,12 @@
             <a:pPr>
               <a:buNone/>
             </a:pPr>
-            <a:r>
-              <a:rPr sz="400"/>
-              <a:t/>
-            </a:r>
+            <a:endParaRPr sz="1800" b="0" i="0">
+              <a:solidFill>
+                <a:srgbClr val="222222"/>
+              </a:solidFill>
+              <a:latin typeface="Helvetica Neue"/>
+            </a:endParaRPr>
           </a:p>
           <a:p>
             <a:pPr algn="l">
@@ -5464,7 +5494,7 @@
 </file>
 
 <file path=ppt/slides/slide11.xml><?xml version="1.0" encoding="utf-8"?>
-<p:sld xmlns:a="http://schemas.openxmlformats.org/drawingml/2006/main" xmlns:p="http://schemas.openxmlformats.org/presentationml/2006/main" xmlns:r="http://schemas.openxmlformats.org/officeDocument/2006/relationships">
+<p:sld xmlns:a="http://schemas.openxmlformats.org/drawingml/2006/main" xmlns:r="http://schemas.openxmlformats.org/officeDocument/2006/relationships" xmlns:p="http://schemas.openxmlformats.org/presentationml/2006/main">
   <p:cSld>
     <p:bg>
       <p:bgPr>
@@ -5480,7 +5510,14 @@
         <p:cNvGrpSpPr/>
         <p:nvPr/>
       </p:nvGrpSpPr>
-      <p:grpSpPr/>
+      <p:grpSpPr>
+        <a:xfrm>
+          <a:off x="0" y="0"/>
+          <a:ext cx="0" cy="0"/>
+          <a:chOff x="0" y="0"/>
+          <a:chExt cx="0" cy="0"/>
+        </a:xfrm>
+      </p:grpSpPr>
       <p:sp>
         <p:nvSpPr>
           <p:cNvPr id="2" name="TextBox 1"/>
@@ -5558,6 +5595,7 @@
           <a:lstStyle/>
           <a:p>
             <a:pPr algn="ctr"/>
+            <a:endParaRPr/>
           </a:p>
         </p:txBody>
       </p:sp>
@@ -5618,10 +5656,12 @@
             <a:pPr>
               <a:buNone/>
             </a:pPr>
-            <a:r>
-              <a:rPr sz="400"/>
-              <a:t/>
-            </a:r>
+            <a:endParaRPr sz="1800" b="0" i="0">
+              <a:solidFill>
+                <a:srgbClr val="222222"/>
+              </a:solidFill>
+              <a:latin typeface="Helvetica Neue"/>
+            </a:endParaRPr>
           </a:p>
           <a:p>
             <a:pPr algn="l">
@@ -5659,10 +5699,12 @@
             <a:pPr>
               <a:buNone/>
             </a:pPr>
-            <a:r>
-              <a:rPr sz="400"/>
-              <a:t/>
-            </a:r>
+            <a:endParaRPr sz="1800" b="0" i="0">
+              <a:solidFill>
+                <a:srgbClr val="222222"/>
+              </a:solidFill>
+              <a:latin typeface="Helvetica Neue"/>
+            </a:endParaRPr>
           </a:p>
           <a:p>
             <a:pPr algn="l">
@@ -5700,10 +5742,12 @@
             <a:pPr>
               <a:buNone/>
             </a:pPr>
-            <a:r>
-              <a:rPr sz="400"/>
-              <a:t/>
-            </a:r>
+            <a:endParaRPr sz="1800" b="0" i="0">
+              <a:solidFill>
+                <a:srgbClr val="222222"/>
+              </a:solidFill>
+              <a:latin typeface="Helvetica Neue"/>
+            </a:endParaRPr>
           </a:p>
           <a:p>
             <a:pPr algn="l">
@@ -5723,15 +5767,16 @@
             <a:pPr>
               <a:buNone/>
             </a:pPr>
-            <a:r>
-              <a:rPr sz="400"/>
-              <a:t/>
-            </a:r>
-          </a:p>
-          <a:p>
-            <a:pPr algn="l" indent="-342900" marL="342900">
+            <a:endParaRPr sz="1800" b="0" i="0">
+              <a:solidFill>
+                <a:srgbClr val="222222"/>
+              </a:solidFill>
+              <a:latin typeface="Helvetica Neue"/>
+            </a:endParaRPr>
+          </a:p>
+          <a:p>
+            <a:pPr marL="342900" indent="-342900" algn="l">
               <a:buChar char="•"/>
-              <a:buFont typeface="Helvetica Neue"/>
             </a:pPr>
             <a:r>
               <a:rPr sz="1800" b="0" i="0">
@@ -5744,9 +5789,8 @@
             </a:r>
           </a:p>
           <a:p>
-            <a:pPr algn="l" indent="-342900" marL="342900">
+            <a:pPr marL="342900" indent="-342900" algn="l">
               <a:buChar char="•"/>
-              <a:buFont typeface="Helvetica Neue"/>
             </a:pPr>
             <a:r>
               <a:rPr sz="1800" b="0" i="0">
@@ -5759,9 +5803,8 @@
             </a:r>
           </a:p>
           <a:p>
-            <a:pPr algn="l" indent="-342900" marL="342900">
+            <a:pPr marL="342900" indent="-342900" algn="l">
               <a:buChar char="•"/>
-              <a:buFont typeface="Helvetica Neue"/>
             </a:pPr>
             <a:r>
               <a:rPr sz="1800" b="0" i="0">
@@ -5774,9 +5817,8 @@
             </a:r>
           </a:p>
           <a:p>
-            <a:pPr algn="l" indent="-342900" marL="342900">
+            <a:pPr marL="342900" indent="-342900" algn="l">
               <a:buChar char="•"/>
-              <a:buFont typeface="Helvetica Neue"/>
             </a:pPr>
             <a:r>
               <a:rPr sz="1800" b="0" i="0">
@@ -5836,7 +5878,7 @@
 </file>
 
 <file path=ppt/slides/slide12.xml><?xml version="1.0" encoding="utf-8"?>
-<p:sld xmlns:a="http://schemas.openxmlformats.org/drawingml/2006/main" xmlns:p="http://schemas.openxmlformats.org/presentationml/2006/main" xmlns:r="http://schemas.openxmlformats.org/officeDocument/2006/relationships">
+<p:sld xmlns:a="http://schemas.openxmlformats.org/drawingml/2006/main" xmlns:r="http://schemas.openxmlformats.org/officeDocument/2006/relationships" xmlns:p="http://schemas.openxmlformats.org/presentationml/2006/main">
   <p:cSld>
     <p:bg>
       <p:bgPr>
@@ -5852,7 +5894,14 @@
         <p:cNvGrpSpPr/>
         <p:nvPr/>
       </p:nvGrpSpPr>
-      <p:grpSpPr/>
+      <p:grpSpPr>
+        <a:xfrm>
+          <a:off x="0" y="0"/>
+          <a:ext cx="0" cy="0"/>
+          <a:chOff x="0" y="0"/>
+          <a:chExt cx="0" cy="0"/>
+        </a:xfrm>
+      </p:grpSpPr>
       <p:sp>
         <p:nvSpPr>
           <p:cNvPr id="2" name="TextBox 1"/>
@@ -5930,6 +5979,7 @@
           <a:lstStyle/>
           <a:p>
             <a:pPr algn="ctr"/>
+            <a:endParaRPr/>
           </a:p>
         </p:txBody>
       </p:sp>
@@ -5942,7 +5992,7 @@
         <p:spPr>
           <a:xfrm>
             <a:off x="640080" y="1417320"/>
-            <a:ext cx="10911535" cy="5212080"/>
+            <a:ext cx="10911535" cy="4524315"/>
           </a:xfrm>
           <a:prstGeom prst="rect">
             <a:avLst/>
@@ -5959,7 +6009,7 @@
               <a:buNone/>
             </a:pPr>
             <a:r>
-              <a:rPr sz="1800" b="0" i="0">
+              <a:rPr sz="1600" b="0" i="0" dirty="0">
                 <a:solidFill>
                   <a:srgbClr val="222222"/>
                 </a:solidFill>
@@ -5972,17 +6022,19 @@
             <a:pPr>
               <a:buNone/>
             </a:pPr>
-            <a:r>
-              <a:rPr sz="400"/>
-              <a:t/>
-            </a:r>
-          </a:p>
-          <a:p>
-            <a:pPr algn="l">
-              <a:buNone/>
-            </a:pPr>
-            <a:r>
-              <a:rPr sz="1800" b="1" i="0">
+            <a:endParaRPr sz="1600" b="0" i="0" dirty="0">
+              <a:solidFill>
+                <a:srgbClr val="222222"/>
+              </a:solidFill>
+              <a:latin typeface="Helvetica Neue"/>
+            </a:endParaRPr>
+          </a:p>
+          <a:p>
+            <a:pPr algn="l">
+              <a:buNone/>
+            </a:pPr>
+            <a:r>
+              <a:rPr sz="1600" b="1" i="0" dirty="0">
                 <a:solidFill>
                   <a:srgbClr val="222222"/>
                 </a:solidFill>
@@ -5991,7 +6043,7 @@
               <a:t>Item 1:</a:t>
             </a:r>
             <a:r>
-              <a:rPr sz="1800" b="0" i="0">
+              <a:rPr sz="1600" b="0" i="0" dirty="0">
                 <a:solidFill>
                   <a:srgbClr val="222222"/>
                 </a:solidFill>
@@ -6005,7 +6057,7 @@
               <a:buNone/>
             </a:pPr>
             <a:r>
-              <a:rPr sz="1800" b="0" i="1">
+              <a:rPr sz="1600" b="0" i="1" dirty="0">
                 <a:solidFill>
                   <a:srgbClr val="222222"/>
                 </a:solidFill>
@@ -6014,7 +6066,7 @@
               <a:t>Annotation:</a:t>
             </a:r>
             <a:r>
-              <a:rPr sz="1800" b="0" i="0">
+              <a:rPr sz="1600" b="0" i="0" dirty="0">
                 <a:solidFill>
                   <a:srgbClr val="222222"/>
                 </a:solidFill>
@@ -6027,17 +6079,19 @@
             <a:pPr>
               <a:buNone/>
             </a:pPr>
-            <a:r>
-              <a:rPr sz="400"/>
-              <a:t/>
-            </a:r>
-          </a:p>
-          <a:p>
-            <a:pPr algn="l">
-              <a:buNone/>
-            </a:pPr>
-            <a:r>
-              <a:rPr sz="1800" b="1" i="0">
+            <a:endParaRPr sz="1600" b="0" i="0" dirty="0">
+              <a:solidFill>
+                <a:srgbClr val="222222"/>
+              </a:solidFill>
+              <a:latin typeface="Helvetica Neue"/>
+            </a:endParaRPr>
+          </a:p>
+          <a:p>
+            <a:pPr algn="l">
+              <a:buNone/>
+            </a:pPr>
+            <a:r>
+              <a:rPr sz="1600" b="1" i="0" dirty="0">
                 <a:solidFill>
                   <a:srgbClr val="222222"/>
                 </a:solidFill>
@@ -6046,21 +6100,39 @@
               <a:t>Item 2:</a:t>
             </a:r>
             <a:r>
-              <a:rPr sz="1800" b="0" i="0">
-                <a:solidFill>
-                  <a:srgbClr val="222222"/>
-                </a:solidFill>
-                <a:latin typeface="Helvetica Neue"/>
-              </a:rPr>
-              <a:t> Second prototype. Spectral centroid mapped to colour hue, onset density mapped to pattern complexity.</a:t>
-            </a:r>
-          </a:p>
-          <a:p>
-            <a:pPr algn="l">
-              <a:buNone/>
-            </a:pPr>
-            <a:r>
-              <a:rPr sz="1800" b="0" i="1">
+              <a:rPr sz="1600" b="0" i="0" dirty="0">
+                <a:solidFill>
+                  <a:srgbClr val="222222"/>
+                </a:solidFill>
+                <a:latin typeface="Helvetica Neue"/>
+              </a:rPr>
+              <a:t> Second prototype. Spectral centroid mapped to </a:t>
+            </a:r>
+            <a:r>
+              <a:rPr sz="1600" b="0" i="0" dirty="0" err="1">
+                <a:solidFill>
+                  <a:srgbClr val="222222"/>
+                </a:solidFill>
+                <a:latin typeface="Helvetica Neue"/>
+              </a:rPr>
+              <a:t>colour</a:t>
+            </a:r>
+            <a:r>
+              <a:rPr sz="1600" b="0" i="0" dirty="0">
+                <a:solidFill>
+                  <a:srgbClr val="222222"/>
+                </a:solidFill>
+                <a:latin typeface="Helvetica Neue"/>
+              </a:rPr>
+              <a:t> hue, onset density mapped to pattern complexity.</a:t>
+            </a:r>
+          </a:p>
+          <a:p>
+            <a:pPr algn="l">
+              <a:buNone/>
+            </a:pPr>
+            <a:r>
+              <a:rPr sz="1600" b="0" i="1" dirty="0">
                 <a:solidFill>
                   <a:srgbClr val="222222"/>
                 </a:solidFill>
@@ -6069,30 +6141,68 @@
               <a:t>Annotation:</a:t>
             </a:r>
             <a:r>
-              <a:rPr sz="1800" b="0" i="0">
-                <a:solidFill>
-                  <a:srgbClr val="222222"/>
-                </a:solidFill>
-                <a:latin typeface="Helvetica Neue"/>
-              </a:rPr>
-              <a:t> "By mapping perceptual audio features to visual properties, the system began producing outputs that 'felt' connected to the sound rather than merely synchronised with it. The distinction between synchronisation and connection became a central concept in the project."</a:t>
+              <a:rPr sz="1600" b="0" i="0" dirty="0">
+                <a:solidFill>
+                  <a:srgbClr val="222222"/>
+                </a:solidFill>
+                <a:latin typeface="Helvetica Neue"/>
+              </a:rPr>
+              <a:t> "By mapping perceptual audio features to visual properties, the system began producing outputs that 'felt' connected to the sound rather than merely </a:t>
+            </a:r>
+            <a:r>
+              <a:rPr sz="1600" b="0" i="0" dirty="0" err="1">
+                <a:solidFill>
+                  <a:srgbClr val="222222"/>
+                </a:solidFill>
+                <a:latin typeface="Helvetica Neue"/>
+              </a:rPr>
+              <a:t>synchronised</a:t>
+            </a:r>
+            <a:r>
+              <a:rPr sz="1600" b="0" i="0" dirty="0">
+                <a:solidFill>
+                  <a:srgbClr val="222222"/>
+                </a:solidFill>
+                <a:latin typeface="Helvetica Neue"/>
+              </a:rPr>
+              <a:t> with it. The distinction between </a:t>
+            </a:r>
+            <a:r>
+              <a:rPr sz="1600" b="0" i="0" dirty="0" err="1">
+                <a:solidFill>
+                  <a:srgbClr val="222222"/>
+                </a:solidFill>
+                <a:latin typeface="Helvetica Neue"/>
+              </a:rPr>
+              <a:t>synchronisation</a:t>
+            </a:r>
+            <a:r>
+              <a:rPr sz="1600" b="0" i="0" dirty="0">
+                <a:solidFill>
+                  <a:srgbClr val="222222"/>
+                </a:solidFill>
+                <a:latin typeface="Helvetica Neue"/>
+              </a:rPr>
+              <a:t> and connection became a central concept in the project."</a:t>
             </a:r>
           </a:p>
           <a:p>
             <a:pPr>
               <a:buNone/>
             </a:pPr>
-            <a:r>
-              <a:rPr sz="400"/>
-              <a:t/>
-            </a:r>
-          </a:p>
-          <a:p>
-            <a:pPr algn="l">
-              <a:buNone/>
-            </a:pPr>
-            <a:r>
-              <a:rPr sz="1800" b="1" i="0">
+            <a:endParaRPr sz="1600" b="0" i="0" dirty="0">
+              <a:solidFill>
+                <a:srgbClr val="222222"/>
+              </a:solidFill>
+              <a:latin typeface="Helvetica Neue"/>
+            </a:endParaRPr>
+          </a:p>
+          <a:p>
+            <a:pPr algn="l">
+              <a:buNone/>
+            </a:pPr>
+            <a:r>
+              <a:rPr sz="1600" b="1" i="0" dirty="0">
                 <a:solidFill>
                   <a:srgbClr val="222222"/>
                 </a:solidFill>
@@ -6101,21 +6211,39 @@
               <a:t>Item 3:</a:t>
             </a:r>
             <a:r>
-              <a:rPr sz="1800" b="0" i="0">
-                <a:solidFill>
-                  <a:srgbClr val="222222"/>
-                </a:solidFill>
-                <a:latin typeface="Helvetica Neue"/>
-              </a:rPr>
-              <a:t> Final system. Multi-feature mapping with a learned crossmodal embedding.</a:t>
-            </a:r>
-          </a:p>
-          <a:p>
-            <a:pPr algn="l">
-              <a:buNone/>
-            </a:pPr>
-            <a:r>
-              <a:rPr sz="1800" b="0" i="1">
+              <a:rPr sz="1600" b="0" i="0" dirty="0">
+                <a:solidFill>
+                  <a:srgbClr val="222222"/>
+                </a:solidFill>
+                <a:latin typeface="Helvetica Neue"/>
+              </a:rPr>
+              <a:t> Final system. Multi-feature mapping with a learned </a:t>
+            </a:r>
+            <a:r>
+              <a:rPr sz="1600" b="0" i="0" dirty="0" err="1">
+                <a:solidFill>
+                  <a:srgbClr val="222222"/>
+                </a:solidFill>
+                <a:latin typeface="Helvetica Neue"/>
+              </a:rPr>
+              <a:t>crossmodal</a:t>
+            </a:r>
+            <a:r>
+              <a:rPr sz="1600" b="0" i="0" dirty="0">
+                <a:solidFill>
+                  <a:srgbClr val="222222"/>
+                </a:solidFill>
+                <a:latin typeface="Helvetica Neue"/>
+              </a:rPr>
+              <a:t> embedding.</a:t>
+            </a:r>
+          </a:p>
+          <a:p>
+            <a:pPr algn="l">
+              <a:buNone/>
+            </a:pPr>
+            <a:r>
+              <a:rPr sz="1600" b="0" i="1" dirty="0">
                 <a:solidFill>
                   <a:srgbClr val="222222"/>
                 </a:solidFill>
@@ -6124,7 +6252,7 @@
               <a:t>Annotation:</a:t>
             </a:r>
             <a:r>
-              <a:rPr sz="1800" b="0" i="0">
+              <a:rPr sz="1600" b="0" i="0" dirty="0">
                 <a:solidFill>
                   <a:srgbClr val="222222"/>
                 </a:solidFill>
@@ -6137,17 +6265,19 @@
             <a:pPr>
               <a:buNone/>
             </a:pPr>
-            <a:r>
-              <a:rPr sz="400"/>
-              <a:t/>
-            </a:r>
-          </a:p>
-          <a:p>
-            <a:pPr algn="l">
-              <a:buNone/>
-            </a:pPr>
-            <a:r>
-              <a:rPr sz="1800" b="0" i="0">
+            <a:endParaRPr sz="1600" b="0" i="0" dirty="0">
+              <a:solidFill>
+                <a:srgbClr val="222222"/>
+              </a:solidFill>
+              <a:latin typeface="Helvetica Neue"/>
+            </a:endParaRPr>
+          </a:p>
+          <a:p>
+            <a:pPr algn="l">
+              <a:buNone/>
+            </a:pPr>
+            <a:r>
+              <a:rPr sz="1600" b="0" i="0" dirty="0">
                 <a:solidFill>
                   <a:srgbClr val="222222"/>
                 </a:solidFill>
@@ -6204,7 +6334,7 @@
 </file>
 
 <file path=ppt/slides/slide13.xml><?xml version="1.0" encoding="utf-8"?>
-<p:sld xmlns:a="http://schemas.openxmlformats.org/drawingml/2006/main" xmlns:p="http://schemas.openxmlformats.org/presentationml/2006/main" xmlns:r="http://schemas.openxmlformats.org/officeDocument/2006/relationships">
+<p:sld xmlns:a="http://schemas.openxmlformats.org/drawingml/2006/main" xmlns:r="http://schemas.openxmlformats.org/officeDocument/2006/relationships" xmlns:p="http://schemas.openxmlformats.org/presentationml/2006/main">
   <p:cSld>
     <p:bg>
       <p:bgPr>
@@ -6220,7 +6350,14 @@
         <p:cNvGrpSpPr/>
         <p:nvPr/>
       </p:nvGrpSpPr>
-      <p:grpSpPr/>
+      <p:grpSpPr>
+        <a:xfrm>
+          <a:off x="0" y="0"/>
+          <a:ext cx="0" cy="0"/>
+          <a:chOff x="0" y="0"/>
+          <a:chExt cx="0" cy="0"/>
+        </a:xfrm>
+      </p:grpSpPr>
       <p:sp>
         <p:nvSpPr>
           <p:cNvPr id="2" name="TextBox 1"/>
@@ -6298,6 +6435,7 @@
           <a:lstStyle/>
           <a:p>
             <a:pPr algn="ctr"/>
+            <a:endParaRPr/>
           </a:p>
         </p:txBody>
       </p:sp>
@@ -6358,10 +6496,12 @@
             <a:pPr>
               <a:buNone/>
             </a:pPr>
-            <a:r>
-              <a:rPr sz="400"/>
-              <a:t/>
-            </a:r>
+            <a:endParaRPr sz="2000" b="0" i="0">
+              <a:solidFill>
+                <a:srgbClr val="222222"/>
+              </a:solidFill>
+              <a:latin typeface="Helvetica Neue"/>
+            </a:endParaRPr>
           </a:p>
           <a:p>
             <a:pPr algn="l">
@@ -6417,10 +6557,12 @@
             <a:pPr>
               <a:buNone/>
             </a:pPr>
-            <a:r>
-              <a:rPr sz="400"/>
-              <a:t/>
-            </a:r>
+            <a:endParaRPr sz="2000" b="0" i="0">
+              <a:solidFill>
+                <a:srgbClr val="222222"/>
+              </a:solidFill>
+              <a:latin typeface="Helvetica Neue"/>
+            </a:endParaRPr>
           </a:p>
           <a:p>
             <a:pPr algn="l">
@@ -6440,10 +6582,12 @@
             <a:pPr>
               <a:buNone/>
             </a:pPr>
-            <a:r>
-              <a:rPr sz="400"/>
-              <a:t/>
-            </a:r>
+            <a:endParaRPr sz="2000" b="0" i="0">
+              <a:solidFill>
+                <a:srgbClr val="222222"/>
+              </a:solidFill>
+              <a:latin typeface="Helvetica Neue"/>
+            </a:endParaRPr>
           </a:p>
           <a:p>
             <a:pPr algn="l">
@@ -6507,7 +6651,7 @@
 </file>
 
 <file path=ppt/slides/slide14.xml><?xml version="1.0" encoding="utf-8"?>
-<p:sld xmlns:a="http://schemas.openxmlformats.org/drawingml/2006/main" xmlns:p="http://schemas.openxmlformats.org/presentationml/2006/main" xmlns:r="http://schemas.openxmlformats.org/officeDocument/2006/relationships">
+<p:sld xmlns:a="http://schemas.openxmlformats.org/drawingml/2006/main" xmlns:r="http://schemas.openxmlformats.org/officeDocument/2006/relationships" xmlns:p="http://schemas.openxmlformats.org/presentationml/2006/main">
   <p:cSld>
     <p:bg>
       <p:bgPr>
@@ -6523,7 +6667,14 @@
         <p:cNvGrpSpPr/>
         <p:nvPr/>
       </p:nvGrpSpPr>
-      <p:grpSpPr/>
+      <p:grpSpPr>
+        <a:xfrm>
+          <a:off x="0" y="0"/>
+          <a:ext cx="0" cy="0"/>
+          <a:chOff x="0" y="0"/>
+          <a:chExt cx="0" cy="0"/>
+        </a:xfrm>
+      </p:grpSpPr>
       <p:sp>
         <p:nvSpPr>
           <p:cNvPr id="2" name="TextBox 1"/>
@@ -6601,6 +6752,7 @@
           <a:lstStyle/>
           <a:p>
             <a:pPr algn="ctr"/>
+            <a:endParaRPr/>
           </a:p>
         </p:txBody>
       </p:sp>
@@ -6643,10 +6795,12 @@
             <a:pPr>
               <a:buNone/>
             </a:pPr>
-            <a:r>
-              <a:rPr sz="400"/>
-              <a:t/>
-            </a:r>
+            <a:endParaRPr sz="2000" b="0" i="0">
+              <a:solidFill>
+                <a:srgbClr val="222222"/>
+              </a:solidFill>
+              <a:latin typeface="Helvetica Neue"/>
+            </a:endParaRPr>
           </a:p>
           <a:p>
             <a:pPr algn="l">
@@ -6675,10 +6829,12 @@
             <a:pPr>
               <a:buNone/>
             </a:pPr>
-            <a:r>
-              <a:rPr sz="400"/>
-              <a:t/>
-            </a:r>
+            <a:endParaRPr sz="2000" b="0" i="0">
+              <a:solidFill>
+                <a:srgbClr val="222222"/>
+              </a:solidFill>
+              <a:latin typeface="Helvetica Neue"/>
+            </a:endParaRPr>
           </a:p>
           <a:p>
             <a:pPr algn="l">
@@ -6707,10 +6863,12 @@
             <a:pPr>
               <a:buNone/>
             </a:pPr>
-            <a:r>
-              <a:rPr sz="400"/>
-              <a:t/>
-            </a:r>
+            <a:endParaRPr sz="2000" b="0" i="0">
+              <a:solidFill>
+                <a:srgbClr val="222222"/>
+              </a:solidFill>
+              <a:latin typeface="Helvetica Neue"/>
+            </a:endParaRPr>
           </a:p>
           <a:p>
             <a:pPr algn="l">
@@ -6739,10 +6897,12 @@
             <a:pPr>
               <a:buNone/>
             </a:pPr>
-            <a:r>
-              <a:rPr sz="400"/>
-              <a:t/>
-            </a:r>
+            <a:endParaRPr sz="2000" b="0" i="0">
+              <a:solidFill>
+                <a:srgbClr val="222222"/>
+              </a:solidFill>
+              <a:latin typeface="Helvetica Neue"/>
+            </a:endParaRPr>
           </a:p>
           <a:p>
             <a:pPr algn="l">
@@ -6806,7 +6966,7 @@
 </file>
 
 <file path=ppt/slides/slide15.xml><?xml version="1.0" encoding="utf-8"?>
-<p:sld xmlns:a="http://schemas.openxmlformats.org/drawingml/2006/main" xmlns:p="http://schemas.openxmlformats.org/presentationml/2006/main" xmlns:r="http://schemas.openxmlformats.org/officeDocument/2006/relationships">
+<p:sld xmlns:a="http://schemas.openxmlformats.org/drawingml/2006/main" xmlns:r="http://schemas.openxmlformats.org/officeDocument/2006/relationships" xmlns:p="http://schemas.openxmlformats.org/presentationml/2006/main">
   <p:cSld>
     <p:bg>
       <p:bgPr>
@@ -6822,7 +6982,14 @@
         <p:cNvGrpSpPr/>
         <p:nvPr/>
       </p:nvGrpSpPr>
-      <p:grpSpPr/>
+      <p:grpSpPr>
+        <a:xfrm>
+          <a:off x="0" y="0"/>
+          <a:ext cx="0" cy="0"/>
+          <a:chOff x="0" y="0"/>
+          <a:chExt cx="0" cy="0"/>
+        </a:xfrm>
+      </p:grpSpPr>
       <p:sp>
         <p:nvSpPr>
           <p:cNvPr id="2" name="TextBox 1"/>
@@ -6900,6 +7067,7 @@
           <a:lstStyle/>
           <a:p>
             <a:pPr algn="ctr"/>
+            <a:endParaRPr/>
           </a:p>
         </p:txBody>
       </p:sp>
@@ -6942,10 +7110,12 @@
             <a:pPr>
               <a:buNone/>
             </a:pPr>
-            <a:r>
-              <a:rPr sz="400"/>
-              <a:t/>
-            </a:r>
+            <a:endParaRPr sz="1800" b="0" i="0">
+              <a:solidFill>
+                <a:srgbClr val="222222"/>
+              </a:solidFill>
+              <a:latin typeface="Helvetica Neue"/>
+            </a:endParaRPr>
           </a:p>
           <a:p>
             <a:pPr algn="l">
@@ -6974,10 +7144,12 @@
             <a:pPr>
               <a:buNone/>
             </a:pPr>
-            <a:r>
-              <a:rPr sz="400"/>
-              <a:t/>
-            </a:r>
+            <a:endParaRPr sz="1800" b="0" i="0">
+              <a:solidFill>
+                <a:srgbClr val="222222"/>
+              </a:solidFill>
+              <a:latin typeface="Helvetica Neue"/>
+            </a:endParaRPr>
           </a:p>
           <a:p>
             <a:pPr algn="l">
@@ -7006,10 +7178,12 @@
             <a:pPr>
               <a:buNone/>
             </a:pPr>
-            <a:r>
-              <a:rPr sz="400"/>
-              <a:t/>
-            </a:r>
+            <a:endParaRPr sz="1800" b="0" i="0">
+              <a:solidFill>
+                <a:srgbClr val="222222"/>
+              </a:solidFill>
+              <a:latin typeface="Helvetica Neue"/>
+            </a:endParaRPr>
           </a:p>
           <a:p>
             <a:pPr algn="l">
@@ -7038,10 +7212,12 @@
             <a:pPr>
               <a:buNone/>
             </a:pPr>
-            <a:r>
-              <a:rPr sz="400"/>
-              <a:t/>
-            </a:r>
+            <a:endParaRPr sz="1800" b="0" i="0">
+              <a:solidFill>
+                <a:srgbClr val="222222"/>
+              </a:solidFill>
+              <a:latin typeface="Helvetica Neue"/>
+            </a:endParaRPr>
           </a:p>
           <a:p>
             <a:pPr algn="l">
@@ -7070,10 +7246,12 @@
             <a:pPr>
               <a:buNone/>
             </a:pPr>
-            <a:r>
-              <a:rPr sz="400"/>
-              <a:t/>
-            </a:r>
+            <a:endParaRPr sz="1800" b="0" i="0">
+              <a:solidFill>
+                <a:srgbClr val="222222"/>
+              </a:solidFill>
+              <a:latin typeface="Helvetica Neue"/>
+            </a:endParaRPr>
           </a:p>
           <a:p>
             <a:pPr algn="l">
@@ -7102,10 +7280,12 @@
             <a:pPr>
               <a:buNone/>
             </a:pPr>
-            <a:r>
-              <a:rPr sz="400"/>
-              <a:t/>
-            </a:r>
+            <a:endParaRPr sz="1800" b="0" i="0">
+              <a:solidFill>
+                <a:srgbClr val="222222"/>
+              </a:solidFill>
+              <a:latin typeface="Helvetica Neue"/>
+            </a:endParaRPr>
           </a:p>
           <a:p>
             <a:pPr algn="l">
@@ -7169,7 +7349,7 @@
 </file>
 
 <file path=ppt/slides/slide16.xml><?xml version="1.0" encoding="utf-8"?>
-<p:sld xmlns:a="http://schemas.openxmlformats.org/drawingml/2006/main" xmlns:p="http://schemas.openxmlformats.org/presentationml/2006/main" xmlns:r="http://schemas.openxmlformats.org/officeDocument/2006/relationships">
+<p:sld xmlns:a="http://schemas.openxmlformats.org/drawingml/2006/main" xmlns:r="http://schemas.openxmlformats.org/officeDocument/2006/relationships" xmlns:p="http://schemas.openxmlformats.org/presentationml/2006/main">
   <p:cSld>
     <p:bg>
       <p:bgPr>
@@ -7185,7 +7365,14 @@
         <p:cNvGrpSpPr/>
         <p:nvPr/>
       </p:nvGrpSpPr>
-      <p:grpSpPr/>
+      <p:grpSpPr>
+        <a:xfrm>
+          <a:off x="0" y="0"/>
+          <a:ext cx="0" cy="0"/>
+          <a:chOff x="0" y="0"/>
+          <a:chExt cx="0" cy="0"/>
+        </a:xfrm>
+      </p:grpSpPr>
       <p:sp>
         <p:nvSpPr>
           <p:cNvPr id="2" name="TextBox 1"/>
@@ -7263,6 +7450,7 @@
           <a:lstStyle/>
           <a:p>
             <a:pPr algn="ctr"/>
+            <a:endParaRPr/>
           </a:p>
         </p:txBody>
       </p:sp>
@@ -7305,10 +7493,12 @@
             <a:pPr>
               <a:buNone/>
             </a:pPr>
-            <a:r>
-              <a:rPr sz="400"/>
-              <a:t/>
-            </a:r>
+            <a:endParaRPr sz="1800" b="0" i="0">
+              <a:solidFill>
+                <a:srgbClr val="222222"/>
+              </a:solidFill>
+              <a:latin typeface="Helvetica Neue"/>
+            </a:endParaRPr>
           </a:p>
           <a:p>
             <a:pPr algn="l">
@@ -7346,10 +7536,12 @@
             <a:pPr>
               <a:buNone/>
             </a:pPr>
-            <a:r>
-              <a:rPr sz="400"/>
-              <a:t/>
-            </a:r>
+            <a:endParaRPr sz="1800" b="0" i="0">
+              <a:solidFill>
+                <a:srgbClr val="222222"/>
+              </a:solidFill>
+              <a:latin typeface="Helvetica Neue"/>
+            </a:endParaRPr>
           </a:p>
           <a:p>
             <a:pPr algn="l">
@@ -7369,15 +7561,16 @@
             <a:pPr>
               <a:buNone/>
             </a:pPr>
-            <a:r>
-              <a:rPr sz="400"/>
-              <a:t/>
-            </a:r>
-          </a:p>
-          <a:p>
-            <a:pPr algn="l" indent="-342900" marL="342900">
+            <a:endParaRPr sz="1800" b="0" i="0">
+              <a:solidFill>
+                <a:srgbClr val="222222"/>
+              </a:solidFill>
+              <a:latin typeface="Helvetica Neue"/>
+            </a:endParaRPr>
+          </a:p>
+          <a:p>
+            <a:pPr marL="342900" indent="-342900" algn="l">
               <a:buChar char="•"/>
-              <a:buFont typeface="Helvetica Neue"/>
             </a:pPr>
             <a:r>
               <a:rPr sz="1800" b="1" i="0">
@@ -7399,9 +7592,8 @@
             </a:r>
           </a:p>
           <a:p>
-            <a:pPr algn="l" indent="-342900" marL="342900">
+            <a:pPr marL="342900" indent="-342900" algn="l">
               <a:buChar char="•"/>
-              <a:buFont typeface="Helvetica Neue"/>
             </a:pPr>
             <a:r>
               <a:rPr sz="1800" b="1" i="0">
@@ -7423,9 +7615,8 @@
             </a:r>
           </a:p>
           <a:p>
-            <a:pPr algn="l" indent="-342900" marL="342900">
+            <a:pPr marL="342900" indent="-342900" algn="l">
               <a:buChar char="•"/>
-              <a:buFont typeface="Helvetica Neue"/>
             </a:pPr>
             <a:r>
               <a:rPr sz="1800" b="1" i="0">
@@ -7447,9 +7638,8 @@
             </a:r>
           </a:p>
           <a:p>
-            <a:pPr algn="l" indent="-342900" marL="342900">
+            <a:pPr marL="342900" indent="-342900" algn="l">
               <a:buChar char="•"/>
-              <a:buFont typeface="Helvetica Neue"/>
             </a:pPr>
             <a:r>
               <a:rPr sz="1800" b="1" i="0">
@@ -7492,10 +7682,12 @@
             <a:pPr>
               <a:buNone/>
             </a:pPr>
-            <a:r>
-              <a:rPr sz="400"/>
-              <a:t/>
-            </a:r>
+            <a:endParaRPr sz="1800" b="0" i="0">
+              <a:solidFill>
+                <a:srgbClr val="222222"/>
+              </a:solidFill>
+              <a:latin typeface="Helvetica Neue"/>
+            </a:endParaRPr>
           </a:p>
           <a:p>
             <a:pPr algn="l">
@@ -7559,7 +7751,7 @@
 </file>
 
 <file path=ppt/slides/slide17.xml><?xml version="1.0" encoding="utf-8"?>
-<p:sld xmlns:a="http://schemas.openxmlformats.org/drawingml/2006/main" xmlns:p="http://schemas.openxmlformats.org/presentationml/2006/main" xmlns:r="http://schemas.openxmlformats.org/officeDocument/2006/relationships">
+<p:sld xmlns:a="http://schemas.openxmlformats.org/drawingml/2006/main" xmlns:r="http://schemas.openxmlformats.org/officeDocument/2006/relationships" xmlns:p="http://schemas.openxmlformats.org/presentationml/2006/main">
   <p:cSld>
     <p:bg>
       <p:bgPr>
@@ -7575,7 +7767,14 @@
         <p:cNvGrpSpPr/>
         <p:nvPr/>
       </p:nvGrpSpPr>
-      <p:grpSpPr/>
+      <p:grpSpPr>
+        <a:xfrm>
+          <a:off x="0" y="0"/>
+          <a:ext cx="0" cy="0"/>
+          <a:chOff x="0" y="0"/>
+          <a:chExt cx="0" cy="0"/>
+        </a:xfrm>
+      </p:grpSpPr>
       <p:sp>
         <p:nvSpPr>
           <p:cNvPr id="2" name="TextBox 1"/>
@@ -7653,6 +7852,7 @@
           <a:lstStyle/>
           <a:p>
             <a:pPr algn="ctr"/>
+            <a:endParaRPr/>
           </a:p>
         </p:txBody>
       </p:sp>
@@ -7695,10 +7895,12 @@
             <a:pPr>
               <a:buNone/>
             </a:pPr>
-            <a:r>
-              <a:rPr sz="400"/>
-              <a:t/>
-            </a:r>
+            <a:endParaRPr sz="2000" b="0" i="0">
+              <a:solidFill>
+                <a:srgbClr val="222222"/>
+              </a:solidFill>
+              <a:latin typeface="Helvetica Neue"/>
+            </a:endParaRPr>
           </a:p>
           <a:p>
             <a:pPr algn="l">
@@ -7727,10 +7929,12 @@
             <a:pPr>
               <a:buNone/>
             </a:pPr>
-            <a:r>
-              <a:rPr sz="400"/>
-              <a:t/>
-            </a:r>
+            <a:endParaRPr sz="2000" b="0" i="0">
+              <a:solidFill>
+                <a:srgbClr val="222222"/>
+              </a:solidFill>
+              <a:latin typeface="Helvetica Neue"/>
+            </a:endParaRPr>
           </a:p>
           <a:p>
             <a:pPr algn="l">
@@ -7759,10 +7963,12 @@
             <a:pPr>
               <a:buNone/>
             </a:pPr>
-            <a:r>
-              <a:rPr sz="400"/>
-              <a:t/>
-            </a:r>
+            <a:endParaRPr sz="2000" b="0" i="0">
+              <a:solidFill>
+                <a:srgbClr val="222222"/>
+              </a:solidFill>
+              <a:latin typeface="Helvetica Neue"/>
+            </a:endParaRPr>
           </a:p>
           <a:p>
             <a:pPr algn="l">
@@ -7791,10 +7997,12 @@
             <a:pPr>
               <a:buNone/>
             </a:pPr>
-            <a:r>
-              <a:rPr sz="400"/>
-              <a:t/>
-            </a:r>
+            <a:endParaRPr sz="2000" b="0" i="0">
+              <a:solidFill>
+                <a:srgbClr val="222222"/>
+              </a:solidFill>
+              <a:latin typeface="Helvetica Neue"/>
+            </a:endParaRPr>
           </a:p>
           <a:p>
             <a:pPr algn="l">
@@ -7867,7 +8075,7 @@
 </file>
 
 <file path=ppt/slides/slide18.xml><?xml version="1.0" encoding="utf-8"?>
-<p:sld xmlns:a="http://schemas.openxmlformats.org/drawingml/2006/main" xmlns:p="http://schemas.openxmlformats.org/presentationml/2006/main" xmlns:r="http://schemas.openxmlformats.org/officeDocument/2006/relationships">
+<p:sld xmlns:a="http://schemas.openxmlformats.org/drawingml/2006/main" xmlns:r="http://schemas.openxmlformats.org/officeDocument/2006/relationships" xmlns:p="http://schemas.openxmlformats.org/presentationml/2006/main">
   <p:cSld>
     <p:bg>
       <p:bgPr>
@@ -7883,7 +8091,14 @@
         <p:cNvGrpSpPr/>
         <p:nvPr/>
       </p:nvGrpSpPr>
-      <p:grpSpPr/>
+      <p:grpSpPr>
+        <a:xfrm>
+          <a:off x="0" y="0"/>
+          <a:ext cx="0" cy="0"/>
+          <a:chOff x="0" y="0"/>
+          <a:chExt cx="0" cy="0"/>
+        </a:xfrm>
+      </p:grpSpPr>
       <p:sp>
         <p:nvSpPr>
           <p:cNvPr id="2" name="TextBox 1"/>
@@ -7961,6 +8176,7 @@
           <a:lstStyle/>
           <a:p>
             <a:pPr algn="ctr"/>
+            <a:endParaRPr/>
           </a:p>
         </p:txBody>
       </p:sp>
@@ -7990,7 +8206,7 @@
               <a:buNone/>
             </a:pPr>
             <a:r>
-              <a:rPr sz="2000" b="1" i="0">
+              <a:rPr b="1" i="0" dirty="0">
                 <a:solidFill>
                   <a:srgbClr val="222222"/>
                 </a:solidFill>
@@ -7999,7 +8215,7 @@
               <a:t>"I'll document later."</a:t>
             </a:r>
             <a:r>
-              <a:rPr sz="2000" b="0" i="0">
+              <a:rPr b="0" i="0" dirty="0">
                 <a:solidFill>
                   <a:srgbClr val="222222"/>
                 </a:solidFill>
@@ -8012,17 +8228,19 @@
             <a:pPr>
               <a:buNone/>
             </a:pPr>
-            <a:r>
-              <a:rPr sz="400"/>
-              <a:t/>
-            </a:r>
-          </a:p>
-          <a:p>
-            <a:pPr algn="l">
-              <a:buNone/>
-            </a:pPr>
-            <a:r>
-              <a:rPr sz="2000" b="1" i="0">
+            <a:endParaRPr b="0" i="0" dirty="0">
+              <a:solidFill>
+                <a:srgbClr val="222222"/>
+              </a:solidFill>
+              <a:latin typeface="Helvetica Neue"/>
+            </a:endParaRPr>
+          </a:p>
+          <a:p>
+            <a:pPr algn="l">
+              <a:buNone/>
+            </a:pPr>
+            <a:r>
+              <a:rPr b="1" i="0" dirty="0">
                 <a:solidFill>
                   <a:srgbClr val="222222"/>
                 </a:solidFill>
@@ -8031,7 +8249,7 @@
               <a:t>"My code is my documentation."</a:t>
             </a:r>
             <a:r>
-              <a:rPr sz="2000" b="0" i="0">
+              <a:rPr b="0" i="0" dirty="0">
                 <a:solidFill>
                   <a:srgbClr val="222222"/>
                 </a:solidFill>
@@ -8044,17 +8262,19 @@
             <a:pPr>
               <a:buNone/>
             </a:pPr>
-            <a:r>
-              <a:rPr sz="400"/>
-              <a:t/>
-            </a:r>
-          </a:p>
-          <a:p>
-            <a:pPr algn="l">
-              <a:buNone/>
-            </a:pPr>
-            <a:r>
-              <a:rPr sz="2000" b="1" i="0">
+            <a:endParaRPr b="0" i="0" dirty="0">
+              <a:solidFill>
+                <a:srgbClr val="222222"/>
+              </a:solidFill>
+              <a:latin typeface="Helvetica Neue"/>
+            </a:endParaRPr>
+          </a:p>
+          <a:p>
+            <a:pPr algn="l">
+              <a:buNone/>
+            </a:pPr>
+            <a:r>
+              <a:rPr b="1" i="0" dirty="0">
                 <a:solidFill>
                   <a:srgbClr val="222222"/>
                 </a:solidFill>
@@ -8063,7 +8283,7 @@
               <a:t>"I documented everything."</a:t>
             </a:r>
             <a:r>
-              <a:rPr sz="2000" b="0" i="0">
+              <a:rPr b="0" i="0" dirty="0">
                 <a:solidFill>
                   <a:srgbClr val="222222"/>
                 </a:solidFill>
@@ -8072,7 +8292,7 @@
               <a:t> If you documented </a:t>
             </a:r>
             <a:r>
-              <a:rPr sz="2000" b="0" i="1">
+              <a:rPr b="0" i="1" dirty="0">
                 <a:solidFill>
                   <a:srgbClr val="222222"/>
                 </a:solidFill>
@@ -8081,7 +8301,7 @@
               <a:t>everything</a:t>
             </a:r>
             <a:r>
-              <a:rPr sz="2000" b="0" i="0">
+              <a:rPr b="0" i="0" dirty="0">
                 <a:solidFill>
                   <a:srgbClr val="222222"/>
                 </a:solidFill>
@@ -8094,17 +8314,19 @@
             <a:pPr>
               <a:buNone/>
             </a:pPr>
-            <a:r>
-              <a:rPr sz="400"/>
-              <a:t/>
-            </a:r>
-          </a:p>
-          <a:p>
-            <a:pPr algn="l">
-              <a:buNone/>
-            </a:pPr>
-            <a:r>
-              <a:rPr sz="2000" b="1" i="0">
+            <a:endParaRPr b="0" i="0" dirty="0">
+              <a:solidFill>
+                <a:srgbClr val="222222"/>
+              </a:solidFill>
+              <a:latin typeface="Helvetica Neue"/>
+            </a:endParaRPr>
+          </a:p>
+          <a:p>
+            <a:pPr algn="l">
+              <a:buNone/>
+            </a:pPr>
+            <a:r>
+              <a:rPr b="1" i="0" dirty="0">
                 <a:solidFill>
                   <a:srgbClr val="222222"/>
                 </a:solidFill>
@@ -8113,7 +8335,7 @@
               <a:t>"The artefact speaks for itself."</a:t>
             </a:r>
             <a:r>
-              <a:rPr sz="2000" b="0" i="0">
+              <a:rPr b="0" i="0" dirty="0">
                 <a:solidFill>
                   <a:srgbClr val="222222"/>
                 </a:solidFill>
@@ -8122,7 +8344,7 @@
               <a:t> It doesn't — not to someone who wasn't in the room while you made it. The artefact speaks </a:t>
             </a:r>
             <a:r>
-              <a:rPr sz="2000" b="0" i="1">
+              <a:rPr b="0" i="1" dirty="0">
                 <a:solidFill>
                   <a:srgbClr val="222222"/>
                 </a:solidFill>
@@ -8131,7 +8353,7 @@
               <a:t>with</a:t>
             </a:r>
             <a:r>
-              <a:rPr sz="2000" b="0" i="0">
+              <a:rPr b="0" i="0" dirty="0">
                 <a:solidFill>
                   <a:srgbClr val="222222"/>
                 </a:solidFill>
@@ -8144,17 +8366,19 @@
             <a:pPr>
               <a:buNone/>
             </a:pPr>
-            <a:r>
-              <a:rPr sz="400"/>
-              <a:t/>
-            </a:r>
-          </a:p>
-          <a:p>
-            <a:pPr algn="l">
-              <a:buNone/>
-            </a:pPr>
-            <a:r>
-              <a:rPr sz="2000" b="1" i="0">
+            <a:endParaRPr b="0" i="0" dirty="0">
+              <a:solidFill>
+                <a:srgbClr val="222222"/>
+              </a:solidFill>
+              <a:latin typeface="Helvetica Neue"/>
+            </a:endParaRPr>
+          </a:p>
+          <a:p>
+            <a:pPr algn="l">
+              <a:buNone/>
+            </a:pPr>
+            <a:r>
+              <a:rPr b="1" i="0" dirty="0">
                 <a:solidFill>
                   <a:srgbClr val="222222"/>
                 </a:solidFill>
@@ -8163,7 +8387,7 @@
               <a:t>"Reflection means saying what I felt."</a:t>
             </a:r>
             <a:r>
-              <a:rPr sz="2000" b="0" i="0">
+              <a:rPr b="0" i="0" dirty="0">
                 <a:solidFill>
                   <a:srgbClr val="222222"/>
                 </a:solidFill>
@@ -8220,7 +8444,7 @@
 </file>
 
 <file path=ppt/slides/slide19.xml><?xml version="1.0" encoding="utf-8"?>
-<p:sld xmlns:a="http://schemas.openxmlformats.org/drawingml/2006/main" xmlns:p="http://schemas.openxmlformats.org/presentationml/2006/main" xmlns:r="http://schemas.openxmlformats.org/officeDocument/2006/relationships">
+<p:sld xmlns:a="http://schemas.openxmlformats.org/drawingml/2006/main" xmlns:r="http://schemas.openxmlformats.org/officeDocument/2006/relationships" xmlns:p="http://schemas.openxmlformats.org/presentationml/2006/main">
   <p:cSld>
     <p:bg>
       <p:bgPr>
@@ -8236,7 +8460,14 @@
         <p:cNvGrpSpPr/>
         <p:nvPr/>
       </p:nvGrpSpPr>
-      <p:grpSpPr/>
+      <p:grpSpPr>
+        <a:xfrm>
+          <a:off x="0" y="0"/>
+          <a:ext cx="0" cy="0"/>
+          <a:chOff x="0" y="0"/>
+          <a:chExt cx="0" cy="0"/>
+        </a:xfrm>
+      </p:grpSpPr>
       <p:sp>
         <p:nvSpPr>
           <p:cNvPr id="2" name="TextBox 1"/>
@@ -8314,6 +8545,7 @@
           <a:lstStyle/>
           <a:p>
             <a:pPr algn="ctr"/>
+            <a:endParaRPr/>
           </a:p>
         </p:txBody>
       </p:sp>
@@ -8356,10 +8588,12 @@
             <a:pPr>
               <a:buNone/>
             </a:pPr>
-            <a:r>
-              <a:rPr sz="400"/>
-              <a:t/>
-            </a:r>
+            <a:endParaRPr sz="1800" b="0" i="0">
+              <a:solidFill>
+                <a:srgbClr val="222222"/>
+              </a:solidFill>
+              <a:latin typeface="Helvetica Neue"/>
+            </a:endParaRPr>
           </a:p>
           <a:p>
             <a:pPr algn="l">
@@ -8379,13 +8613,15 @@
             <a:pPr>
               <a:buNone/>
             </a:pPr>
-            <a:r>
-              <a:rPr sz="400"/>
-              <a:t/>
-            </a:r>
-          </a:p>
-          <a:p>
-            <a:pPr algn="l" marL="342900">
+            <a:endParaRPr sz="1800" b="0" i="0">
+              <a:solidFill>
+                <a:srgbClr val="222222"/>
+              </a:solidFill>
+              <a:latin typeface="Helvetica Neue"/>
+            </a:endParaRPr>
+          </a:p>
+          <a:p>
+            <a:pPr marL="342900" algn="l">
               <a:buNone/>
             </a:pPr>
             <a:r>
@@ -8408,7 +8644,7 @@
             </a:r>
           </a:p>
           <a:p>
-            <a:pPr algn="l" marL="342900">
+            <a:pPr marL="342900" algn="l">
               <a:buNone/>
             </a:pPr>
             <a:r>
@@ -8431,7 +8667,7 @@
             </a:r>
           </a:p>
           <a:p>
-            <a:pPr algn="l" marL="342900">
+            <a:pPr marL="342900" algn="l">
               <a:buNone/>
             </a:pPr>
             <a:r>
@@ -8454,7 +8690,7 @@
             </a:r>
           </a:p>
           <a:p>
-            <a:pPr algn="l" marL="342900">
+            <a:pPr marL="342900" algn="l">
               <a:buNone/>
             </a:pPr>
             <a:r>
@@ -8480,10 +8716,12 @@
             <a:pPr>
               <a:buNone/>
             </a:pPr>
-            <a:r>
-              <a:rPr sz="400"/>
-              <a:t/>
-            </a:r>
+            <a:endParaRPr sz="1800" b="1" i="0">
+              <a:solidFill>
+                <a:srgbClr val="222222"/>
+              </a:solidFill>
+              <a:latin typeface="Helvetica Neue"/>
+            </a:endParaRPr>
           </a:p>
           <a:p>
             <a:pPr algn="l">
@@ -8547,7 +8785,7 @@
 </file>
 
 <file path=ppt/slides/slide2.xml><?xml version="1.0" encoding="utf-8"?>
-<p:sld xmlns:a="http://schemas.openxmlformats.org/drawingml/2006/main" xmlns:p="http://schemas.openxmlformats.org/presentationml/2006/main" xmlns:r="http://schemas.openxmlformats.org/officeDocument/2006/relationships">
+<p:sld xmlns:a="http://schemas.openxmlformats.org/drawingml/2006/main" xmlns:r="http://schemas.openxmlformats.org/officeDocument/2006/relationships" xmlns:p="http://schemas.openxmlformats.org/presentationml/2006/main">
   <p:cSld>
     <p:bg>
       <p:bgPr>
@@ -8563,7 +8801,14 @@
         <p:cNvGrpSpPr/>
         <p:nvPr/>
       </p:nvGrpSpPr>
-      <p:grpSpPr/>
+      <p:grpSpPr>
+        <a:xfrm>
+          <a:off x="0" y="0"/>
+          <a:ext cx="0" cy="0"/>
+          <a:chOff x="0" y="0"/>
+          <a:chExt cx="0" cy="0"/>
+        </a:xfrm>
+      </p:grpSpPr>
       <p:sp>
         <p:nvSpPr>
           <p:cNvPr id="2" name="TextBox 1"/>
@@ -8573,7 +8818,7 @@
         <p:spPr>
           <a:xfrm>
             <a:off x="640080" y="320040"/>
-            <a:ext cx="10911535" cy="1188720"/>
+            <a:ext cx="10911535" cy="461665"/>
           </a:xfrm>
           <a:prstGeom prst="rect">
             <a:avLst/>
@@ -8590,14 +8835,20 @@
               <a:buNone/>
             </a:pPr>
             <a:r>
-              <a:rPr sz="2400" b="1" i="0">
+              <a:rPr lang="en-GB" sz="2400" b="1" i="0" dirty="0">
                 <a:solidFill>
                   <a:srgbClr val="1A1A2E"/>
                 </a:solidFill>
                 <a:latin typeface="Helvetica Neue"/>
               </a:rPr>
-              <a:t>Title</a:t>
-            </a:r>
+              <a:t>Practice as Research</a:t>
+            </a:r>
+            <a:endParaRPr sz="2400" b="1" i="0" dirty="0">
+              <a:solidFill>
+                <a:srgbClr val="1A1A2E"/>
+              </a:solidFill>
+              <a:latin typeface="Helvetica Neue"/>
+            </a:endParaRPr>
           </a:p>
         </p:txBody>
       </p:sp>
@@ -8641,6 +8892,7 @@
           <a:lstStyle/>
           <a:p>
             <a:pPr algn="ctr"/>
+            <a:endParaRPr/>
           </a:p>
         </p:txBody>
       </p:sp>
@@ -8697,10 +8949,12 @@
             <a:pPr>
               <a:buNone/>
             </a:pPr>
-            <a:r>
-              <a:rPr sz="400"/>
-              <a:t/>
-            </a:r>
+            <a:endParaRPr sz="2000" b="0" i="0">
+              <a:solidFill>
+                <a:srgbClr val="222222"/>
+              </a:solidFill>
+              <a:latin typeface="Helvetica Neue"/>
+            </a:endParaRPr>
           </a:p>
           <a:p>
             <a:pPr algn="l">
@@ -8721,7 +8975,7 @@
                   <a:srgbClr val="222222"/>
                 </a:solidFill>
                 <a:latin typeface="Helvetica Neue"/>
-                <a:hlinkClick r:id="rId2"/>
+                <a:hlinkClick r:id="rId3"/>
               </a:rPr>
               <a:t>Creative Computing Institute</a:t>
             </a:r>
@@ -8783,7 +9037,7 @@
 </file>
 
 <file path=ppt/slides/slide20.xml><?xml version="1.0" encoding="utf-8"?>
-<p:sld xmlns:a="http://schemas.openxmlformats.org/drawingml/2006/main" xmlns:p="http://schemas.openxmlformats.org/presentationml/2006/main" xmlns:r="http://schemas.openxmlformats.org/officeDocument/2006/relationships">
+<p:sld xmlns:a="http://schemas.openxmlformats.org/drawingml/2006/main" xmlns:r="http://schemas.openxmlformats.org/officeDocument/2006/relationships" xmlns:p="http://schemas.openxmlformats.org/presentationml/2006/main">
   <p:cSld>
     <p:bg>
       <p:bgPr>
@@ -8799,7 +9053,14 @@
         <p:cNvGrpSpPr/>
         <p:nvPr/>
       </p:nvGrpSpPr>
-      <p:grpSpPr/>
+      <p:grpSpPr>
+        <a:xfrm>
+          <a:off x="0" y="0"/>
+          <a:ext cx="0" cy="0"/>
+          <a:chOff x="0" y="0"/>
+          <a:chExt cx="0" cy="0"/>
+        </a:xfrm>
+      </p:grpSpPr>
       <p:sp>
         <p:nvSpPr>
           <p:cNvPr id="2" name="TextBox 1"/>
@@ -8877,6 +9138,7 @@
           <a:lstStyle/>
           <a:p>
             <a:pPr algn="ctr"/>
+            <a:endParaRPr/>
           </a:p>
         </p:txBody>
       </p:sp>
@@ -8928,10 +9190,12 @@
             <a:pPr>
               <a:buNone/>
             </a:pPr>
-            <a:r>
-              <a:rPr sz="400"/>
-              <a:t/>
-            </a:r>
+            <a:endParaRPr sz="2000" b="1" i="0">
+              <a:solidFill>
+                <a:srgbClr val="222222"/>
+              </a:solidFill>
+              <a:latin typeface="Helvetica Neue"/>
+            </a:endParaRPr>
           </a:p>
           <a:p>
             <a:pPr algn="l">
@@ -8951,10 +9215,12 @@
             <a:pPr>
               <a:buNone/>
             </a:pPr>
-            <a:r>
-              <a:rPr sz="400"/>
-              <a:t/>
-            </a:r>
+            <a:endParaRPr sz="2000" b="0" i="0">
+              <a:solidFill>
+                <a:srgbClr val="222222"/>
+              </a:solidFill>
+              <a:latin typeface="Helvetica Neue"/>
+            </a:endParaRPr>
           </a:p>
           <a:p>
             <a:pPr algn="l">
@@ -8974,15 +9240,16 @@
             <a:pPr>
               <a:buNone/>
             </a:pPr>
-            <a:r>
-              <a:rPr sz="400"/>
-              <a:t/>
-            </a:r>
-          </a:p>
-          <a:p>
-            <a:pPr algn="l" indent="-342900" marL="342900">
+            <a:endParaRPr sz="2000" b="0" i="0">
+              <a:solidFill>
+                <a:srgbClr val="222222"/>
+              </a:solidFill>
+              <a:latin typeface="Helvetica Neue"/>
+            </a:endParaRPr>
+          </a:p>
+          <a:p>
+            <a:pPr marL="342900" indent="-342900" algn="l">
               <a:buChar char="•"/>
-              <a:buFont typeface="Helvetica Neue"/>
             </a:pPr>
             <a:r>
               <a:rPr sz="2000" b="0" i="0">
@@ -8995,9 +9262,8 @@
             </a:r>
           </a:p>
           <a:p>
-            <a:pPr algn="l" indent="-342900" marL="342900">
+            <a:pPr marL="342900" indent="-342900" algn="l">
               <a:buChar char="•"/>
-              <a:buFont typeface="Helvetica Neue"/>
             </a:pPr>
             <a:r>
               <a:rPr sz="2000" b="0" i="0">
@@ -9010,9 +9276,8 @@
             </a:r>
           </a:p>
           <a:p>
-            <a:pPr algn="l" indent="-342900" marL="342900">
+            <a:pPr marL="342900" indent="-342900" algn="l">
               <a:buChar char="•"/>
-              <a:buFont typeface="Helvetica Neue"/>
             </a:pPr>
             <a:r>
               <a:rPr sz="2000" b="0" i="0">
@@ -9072,7 +9337,7 @@
 </file>
 
 <file path=ppt/slides/slide21.xml><?xml version="1.0" encoding="utf-8"?>
-<p:sld xmlns:a="http://schemas.openxmlformats.org/drawingml/2006/main" xmlns:p="http://schemas.openxmlformats.org/presentationml/2006/main" xmlns:r="http://schemas.openxmlformats.org/officeDocument/2006/relationships">
+<p:sld xmlns:a="http://schemas.openxmlformats.org/drawingml/2006/main" xmlns:r="http://schemas.openxmlformats.org/officeDocument/2006/relationships" xmlns:p="http://schemas.openxmlformats.org/presentationml/2006/main">
   <p:cSld>
     <p:bg>
       <p:bgPr>
@@ -9088,7 +9353,14 @@
         <p:cNvGrpSpPr/>
         <p:nvPr/>
       </p:nvGrpSpPr>
-      <p:grpSpPr/>
+      <p:grpSpPr>
+        <a:xfrm>
+          <a:off x="0" y="0"/>
+          <a:ext cx="0" cy="0"/>
+          <a:chOff x="0" y="0"/>
+          <a:chExt cx="0" cy="0"/>
+        </a:xfrm>
+      </p:grpSpPr>
       <p:sp>
         <p:nvSpPr>
           <p:cNvPr id="2" name="TextBox 1"/>
@@ -9166,6 +9438,7 @@
           <a:lstStyle/>
           <a:p>
             <a:pPr algn="ctr"/>
+            <a:endParaRPr/>
           </a:p>
         </p:txBody>
       </p:sp>
@@ -9226,10 +9499,12 @@
             <a:pPr>
               <a:buNone/>
             </a:pPr>
-            <a:r>
-              <a:rPr sz="400"/>
-              <a:t/>
-            </a:r>
+            <a:endParaRPr sz="1800" b="0" i="0">
+              <a:solidFill>
+                <a:srgbClr val="222222"/>
+              </a:solidFill>
+              <a:latin typeface="Helvetica Neue"/>
+            </a:endParaRPr>
           </a:p>
           <a:p>
             <a:pPr algn="l">
@@ -9286,10 +9561,12 @@
             <a:pPr>
               <a:buNone/>
             </a:pPr>
-            <a:r>
-              <a:rPr sz="400"/>
-              <a:t/>
-            </a:r>
+            <a:endParaRPr sz="1800" b="0" i="0">
+              <a:solidFill>
+                <a:srgbClr val="222222"/>
+              </a:solidFill>
+              <a:latin typeface="Helvetica Neue"/>
+            </a:endParaRPr>
           </a:p>
           <a:p>
             <a:pPr algn="l">
@@ -9328,10 +9605,12 @@
             <a:pPr>
               <a:buNone/>
             </a:pPr>
-            <a:r>
-              <a:rPr sz="400"/>
-              <a:t/>
-            </a:r>
+            <a:endParaRPr sz="1800" b="0" i="0">
+              <a:solidFill>
+                <a:srgbClr val="222222"/>
+              </a:solidFill>
+              <a:latin typeface="Helvetica Neue"/>
+            </a:endParaRPr>
           </a:p>
           <a:p>
             <a:pPr algn="l">
@@ -9370,10 +9649,12 @@
             <a:pPr>
               <a:buNone/>
             </a:pPr>
-            <a:r>
-              <a:rPr sz="400"/>
-              <a:t/>
-            </a:r>
+            <a:endParaRPr sz="1800" b="0" i="0">
+              <a:solidFill>
+                <a:srgbClr val="222222"/>
+              </a:solidFill>
+              <a:latin typeface="Helvetica Neue"/>
+            </a:endParaRPr>
           </a:p>
           <a:p>
             <a:pPr algn="l">
@@ -9412,10 +9693,12 @@
             <a:pPr>
               <a:buNone/>
             </a:pPr>
-            <a:r>
-              <a:rPr sz="400"/>
-              <a:t/>
-            </a:r>
+            <a:endParaRPr sz="1800" b="0" i="0">
+              <a:solidFill>
+                <a:srgbClr val="222222"/>
+              </a:solidFill>
+              <a:latin typeface="Helvetica Neue"/>
+            </a:endParaRPr>
           </a:p>
           <a:p>
             <a:pPr algn="l">
@@ -9453,10 +9736,12 @@
             <a:pPr>
               <a:buNone/>
             </a:pPr>
-            <a:r>
-              <a:rPr sz="400"/>
-              <a:t/>
-            </a:r>
+            <a:endParaRPr sz="1800" b="0" i="0">
+              <a:solidFill>
+                <a:srgbClr val="222222"/>
+              </a:solidFill>
+              <a:latin typeface="Helvetica Neue"/>
+            </a:endParaRPr>
           </a:p>
           <a:p>
             <a:pPr algn="l">
@@ -9494,10 +9779,12 @@
             <a:pPr>
               <a:buNone/>
             </a:pPr>
-            <a:r>
-              <a:rPr sz="400"/>
-              <a:t/>
-            </a:r>
+            <a:endParaRPr sz="1800" b="0" i="0">
+              <a:solidFill>
+                <a:srgbClr val="222222"/>
+              </a:solidFill>
+              <a:latin typeface="Helvetica Neue"/>
+            </a:endParaRPr>
           </a:p>
           <a:p>
             <a:pPr algn="l">
@@ -9598,7 +9885,7 @@
 </file>
 
 <file path=ppt/slides/slide22.xml><?xml version="1.0" encoding="utf-8"?>
-<p:sld xmlns:a="http://schemas.openxmlformats.org/drawingml/2006/main" xmlns:p="http://schemas.openxmlformats.org/presentationml/2006/main" xmlns:r="http://schemas.openxmlformats.org/officeDocument/2006/relationships">
+<p:sld xmlns:a="http://schemas.openxmlformats.org/drawingml/2006/main" xmlns:r="http://schemas.openxmlformats.org/officeDocument/2006/relationships" xmlns:p="http://schemas.openxmlformats.org/presentationml/2006/main">
   <p:cSld>
     <p:bg>
       <p:bgPr>
@@ -9614,7 +9901,14 @@
         <p:cNvGrpSpPr/>
         <p:nvPr/>
       </p:nvGrpSpPr>
-      <p:grpSpPr/>
+      <p:grpSpPr>
+        <a:xfrm>
+          <a:off x="0" y="0"/>
+          <a:ext cx="0" cy="0"/>
+          <a:chOff x="0" y="0"/>
+          <a:chExt cx="0" cy="0"/>
+        </a:xfrm>
+      </p:grpSpPr>
       <p:sp>
         <p:nvSpPr>
           <p:cNvPr id="2" name="TextBox 1"/>
@@ -9692,6 +9986,7 @@
           <a:lstStyle/>
           <a:p>
             <a:pPr algn="ctr"/>
+            <a:endParaRPr/>
           </a:p>
         </p:txBody>
       </p:sp>
@@ -9806,7 +10101,7 @@
 </file>
 
 <file path=ppt/slides/slide23.xml><?xml version="1.0" encoding="utf-8"?>
-<p:sld xmlns:a="http://schemas.openxmlformats.org/drawingml/2006/main" xmlns:p="http://schemas.openxmlformats.org/presentationml/2006/main" xmlns:r="http://schemas.openxmlformats.org/officeDocument/2006/relationships">
+<p:sld xmlns:a="http://schemas.openxmlformats.org/drawingml/2006/main" xmlns:r="http://schemas.openxmlformats.org/officeDocument/2006/relationships" xmlns:p="http://schemas.openxmlformats.org/presentationml/2006/main">
   <p:cSld>
     <p:bg>
       <p:bgPr>
@@ -9822,7 +10117,14 @@
         <p:cNvGrpSpPr/>
         <p:nvPr/>
       </p:nvGrpSpPr>
-      <p:grpSpPr/>
+      <p:grpSpPr>
+        <a:xfrm>
+          <a:off x="0" y="0"/>
+          <a:ext cx="0" cy="0"/>
+          <a:chOff x="0" y="0"/>
+          <a:chExt cx="0" cy="0"/>
+        </a:xfrm>
+      </p:grpSpPr>
       <p:sp>
         <p:nvSpPr>
           <p:cNvPr id="2" name="TextBox 1"/>
@@ -9900,6 +10202,7 @@
           <a:lstStyle/>
           <a:p>
             <a:pPr algn="ctr"/>
+            <a:endParaRPr/>
           </a:p>
         </p:txBody>
       </p:sp>
@@ -9986,7 +10289,7 @@
 </file>
 
 <file path=ppt/slides/slide3.xml><?xml version="1.0" encoding="utf-8"?>
-<p:sld xmlns:a="http://schemas.openxmlformats.org/drawingml/2006/main" xmlns:p="http://schemas.openxmlformats.org/presentationml/2006/main" xmlns:r="http://schemas.openxmlformats.org/officeDocument/2006/relationships">
+<p:sld xmlns:a="http://schemas.openxmlformats.org/drawingml/2006/main" xmlns:r="http://schemas.openxmlformats.org/officeDocument/2006/relationships" xmlns:p="http://schemas.openxmlformats.org/presentationml/2006/main">
   <p:cSld>
     <p:bg>
       <p:bgPr>
@@ -10002,7 +10305,14 @@
         <p:cNvGrpSpPr/>
         <p:nvPr/>
       </p:nvGrpSpPr>
-      <p:grpSpPr/>
+      <p:grpSpPr>
+        <a:xfrm>
+          <a:off x="0" y="0"/>
+          <a:ext cx="0" cy="0"/>
+          <a:chOff x="0" y="0"/>
+          <a:chExt cx="0" cy="0"/>
+        </a:xfrm>
+      </p:grpSpPr>
       <p:sp>
         <p:nvSpPr>
           <p:cNvPr id="2" name="TextBox 1"/>
@@ -10080,6 +10390,7 @@
           <a:lstStyle/>
           <a:p>
             <a:pPr algn="ctr"/>
+            <a:endParaRPr/>
           </a:p>
         </p:txBody>
       </p:sp>
@@ -10164,10 +10475,12 @@
             <a:pPr>
               <a:buNone/>
             </a:pPr>
-            <a:r>
-              <a:rPr sz="400"/>
-              <a:t/>
-            </a:r>
+            <a:endParaRPr sz="1800" b="0" i="0">
+              <a:solidFill>
+                <a:srgbClr val="222222"/>
+              </a:solidFill>
+              <a:latin typeface="Helvetica Neue"/>
+            </a:endParaRPr>
           </a:p>
           <a:p>
             <a:pPr algn="l">
@@ -10196,10 +10509,12 @@
             <a:pPr>
               <a:buNone/>
             </a:pPr>
-            <a:r>
-              <a:rPr sz="400"/>
-              <a:t/>
-            </a:r>
+            <a:endParaRPr sz="1800" b="1" i="0">
+              <a:solidFill>
+                <a:srgbClr val="222222"/>
+              </a:solidFill>
+              <a:latin typeface="Helvetica Neue"/>
+            </a:endParaRPr>
           </a:p>
           <a:p>
             <a:pPr algn="l">
@@ -10219,13 +10534,15 @@
             <a:pPr>
               <a:buNone/>
             </a:pPr>
-            <a:r>
-              <a:rPr sz="400"/>
-              <a:t/>
-            </a:r>
-          </a:p>
-          <a:p>
-            <a:pPr algn="l" marL="342900">
+            <a:endParaRPr sz="1800" b="0" i="0">
+              <a:solidFill>
+                <a:srgbClr val="222222"/>
+              </a:solidFill>
+              <a:latin typeface="Helvetica Neue"/>
+            </a:endParaRPr>
+          </a:p>
+          <a:p>
+            <a:pPr marL="342900" algn="l">
               <a:buNone/>
             </a:pPr>
             <a:r>
@@ -10257,7 +10574,7 @@
             </a:r>
           </a:p>
           <a:p>
-            <a:pPr algn="l" marL="342900">
+            <a:pPr marL="342900" algn="l">
               <a:buNone/>
             </a:pPr>
             <a:r>
@@ -10336,7 +10653,7 @@
 </file>
 
 <file path=ppt/slides/slide4.xml><?xml version="1.0" encoding="utf-8"?>
-<p:sld xmlns:a="http://schemas.openxmlformats.org/drawingml/2006/main" xmlns:p="http://schemas.openxmlformats.org/presentationml/2006/main" xmlns:r="http://schemas.openxmlformats.org/officeDocument/2006/relationships">
+<p:sld xmlns:a="http://schemas.openxmlformats.org/drawingml/2006/main" xmlns:r="http://schemas.openxmlformats.org/officeDocument/2006/relationships" xmlns:p="http://schemas.openxmlformats.org/presentationml/2006/main">
   <p:cSld>
     <p:bg>
       <p:bgPr>
@@ -10352,7 +10669,14 @@
         <p:cNvGrpSpPr/>
         <p:nvPr/>
       </p:nvGrpSpPr>
-      <p:grpSpPr/>
+      <p:grpSpPr>
+        <a:xfrm>
+          <a:off x="0" y="0"/>
+          <a:ext cx="0" cy="0"/>
+          <a:chOff x="0" y="0"/>
+          <a:chExt cx="0" cy="0"/>
+        </a:xfrm>
+      </p:grpSpPr>
       <p:sp>
         <p:nvSpPr>
           <p:cNvPr id="2" name="TextBox 1"/>
@@ -10430,6 +10754,7 @@
           <a:lstStyle/>
           <a:p>
             <a:pPr algn="ctr"/>
+            <a:endParaRPr/>
           </a:p>
         </p:txBody>
       </p:sp>
@@ -10508,10 +10833,12 @@
             <a:pPr>
               <a:buNone/>
             </a:pPr>
-            <a:r>
-              <a:rPr sz="400"/>
-              <a:t/>
-            </a:r>
+            <a:endParaRPr sz="2000" b="0" i="0">
+              <a:solidFill>
+                <a:srgbClr val="222222"/>
+              </a:solidFill>
+              <a:latin typeface="Helvetica Neue"/>
+            </a:endParaRPr>
           </a:p>
           <a:p>
             <a:pPr algn="l">
@@ -10531,10 +10858,12 @@
             <a:pPr>
               <a:buNone/>
             </a:pPr>
-            <a:r>
-              <a:rPr sz="400"/>
-              <a:t/>
-            </a:r>
+            <a:endParaRPr sz="2000" b="0" i="0">
+              <a:solidFill>
+                <a:srgbClr val="222222"/>
+              </a:solidFill>
+              <a:latin typeface="Helvetica Neue"/>
+            </a:endParaRPr>
           </a:p>
           <a:p>
             <a:pPr algn="l">
@@ -10563,10 +10892,12 @@
             <a:pPr>
               <a:buNone/>
             </a:pPr>
-            <a:r>
-              <a:rPr sz="400"/>
-              <a:t/>
-            </a:r>
+            <a:endParaRPr sz="2000" b="1" i="0">
+              <a:solidFill>
+                <a:srgbClr val="222222"/>
+              </a:solidFill>
+              <a:latin typeface="Helvetica Neue"/>
+            </a:endParaRPr>
           </a:p>
           <a:p>
             <a:pPr algn="l">
@@ -10630,7 +10961,7 @@
 </file>
 
 <file path=ppt/slides/slide5.xml><?xml version="1.0" encoding="utf-8"?>
-<p:sld xmlns:a="http://schemas.openxmlformats.org/drawingml/2006/main" xmlns:p="http://schemas.openxmlformats.org/presentationml/2006/main" xmlns:r="http://schemas.openxmlformats.org/officeDocument/2006/relationships">
+<p:sld xmlns:a="http://schemas.openxmlformats.org/drawingml/2006/main" xmlns:r="http://schemas.openxmlformats.org/officeDocument/2006/relationships" xmlns:p="http://schemas.openxmlformats.org/presentationml/2006/main">
   <p:cSld>
     <p:bg>
       <p:bgPr>
@@ -10646,7 +10977,14 @@
         <p:cNvGrpSpPr/>
         <p:nvPr/>
       </p:nvGrpSpPr>
-      <p:grpSpPr/>
+      <p:grpSpPr>
+        <a:xfrm>
+          <a:off x="0" y="0"/>
+          <a:ext cx="0" cy="0"/>
+          <a:chOff x="0" y="0"/>
+          <a:chExt cx="0" cy="0"/>
+        </a:xfrm>
+      </p:grpSpPr>
       <p:sp>
         <p:nvSpPr>
           <p:cNvPr id="2" name="TextBox 1"/>
@@ -10724,6 +11062,7 @@
           <a:lstStyle/>
           <a:p>
             <a:pPr algn="ctr"/>
+            <a:endParaRPr/>
           </a:p>
         </p:txBody>
       </p:sp>
@@ -10766,10 +11105,12 @@
             <a:pPr>
               <a:buNone/>
             </a:pPr>
-            <a:r>
-              <a:rPr sz="400"/>
-              <a:t/>
-            </a:r>
+            <a:endParaRPr sz="2000" b="0" i="0">
+              <a:solidFill>
+                <a:srgbClr val="222222"/>
+              </a:solidFill>
+              <a:latin typeface="Helvetica Neue"/>
+            </a:endParaRPr>
           </a:p>
           <a:p>
             <a:pPr algn="l">
@@ -10816,10 +11157,12 @@
             <a:pPr>
               <a:buNone/>
             </a:pPr>
-            <a:r>
-              <a:rPr sz="400"/>
-              <a:t/>
-            </a:r>
+            <a:endParaRPr sz="2000" b="0" i="0">
+              <a:solidFill>
+                <a:srgbClr val="222222"/>
+              </a:solidFill>
+              <a:latin typeface="Helvetica Neue"/>
+            </a:endParaRPr>
           </a:p>
           <a:p>
             <a:pPr algn="l">
@@ -10866,10 +11209,12 @@
             <a:pPr>
               <a:buNone/>
             </a:pPr>
-            <a:r>
-              <a:rPr sz="400"/>
-              <a:t/>
-            </a:r>
+            <a:endParaRPr sz="2000" b="0" i="0">
+              <a:solidFill>
+                <a:srgbClr val="222222"/>
+              </a:solidFill>
+              <a:latin typeface="Helvetica Neue"/>
+            </a:endParaRPr>
           </a:p>
           <a:p>
             <a:pPr algn="l">
@@ -10951,7 +11296,7 @@
 </file>
 
 <file path=ppt/slides/slide6.xml><?xml version="1.0" encoding="utf-8"?>
-<p:sld xmlns:a="http://schemas.openxmlformats.org/drawingml/2006/main" xmlns:p="http://schemas.openxmlformats.org/presentationml/2006/main" xmlns:r="http://schemas.openxmlformats.org/officeDocument/2006/relationships">
+<p:sld xmlns:a="http://schemas.openxmlformats.org/drawingml/2006/main" xmlns:r="http://schemas.openxmlformats.org/officeDocument/2006/relationships" xmlns:p="http://schemas.openxmlformats.org/presentationml/2006/main">
   <p:cSld>
     <p:bg>
       <p:bgPr>
@@ -10967,7 +11312,14 @@
         <p:cNvGrpSpPr/>
         <p:nvPr/>
       </p:nvGrpSpPr>
-      <p:grpSpPr/>
+      <p:grpSpPr>
+        <a:xfrm>
+          <a:off x="0" y="0"/>
+          <a:ext cx="0" cy="0"/>
+          <a:chOff x="0" y="0"/>
+          <a:chExt cx="0" cy="0"/>
+        </a:xfrm>
+      </p:grpSpPr>
       <p:sp>
         <p:nvSpPr>
           <p:cNvPr id="2" name="TextBox 1"/>
@@ -11045,6 +11397,7 @@
           <a:lstStyle/>
           <a:p>
             <a:pPr algn="ctr"/>
+            <a:endParaRPr/>
           </a:p>
         </p:txBody>
       </p:sp>
@@ -11087,10 +11440,12 @@
             <a:pPr>
               <a:buNone/>
             </a:pPr>
-            <a:r>
-              <a:rPr sz="400"/>
-              <a:t/>
-            </a:r>
+            <a:endParaRPr sz="2000" b="0" i="0">
+              <a:solidFill>
+                <a:srgbClr val="222222"/>
+              </a:solidFill>
+              <a:latin typeface="Helvetica Neue"/>
+            </a:endParaRPr>
           </a:p>
           <a:p>
             <a:pPr algn="l">
@@ -11119,10 +11474,12 @@
             <a:pPr>
               <a:buNone/>
             </a:pPr>
-            <a:r>
-              <a:rPr sz="400"/>
-              <a:t/>
-            </a:r>
+            <a:endParaRPr sz="2000" b="0" i="0">
+              <a:solidFill>
+                <a:srgbClr val="222222"/>
+              </a:solidFill>
+              <a:latin typeface="Helvetica Neue"/>
+            </a:endParaRPr>
           </a:p>
           <a:p>
             <a:pPr algn="l">
@@ -11151,10 +11508,12 @@
             <a:pPr>
               <a:buNone/>
             </a:pPr>
-            <a:r>
-              <a:rPr sz="400"/>
-              <a:t/>
-            </a:r>
+            <a:endParaRPr sz="2000" b="0" i="0">
+              <a:solidFill>
+                <a:srgbClr val="222222"/>
+              </a:solidFill>
+              <a:latin typeface="Helvetica Neue"/>
+            </a:endParaRPr>
           </a:p>
           <a:p>
             <a:pPr algn="l">
@@ -11218,7 +11577,7 @@
 </file>
 
 <file path=ppt/slides/slide7.xml><?xml version="1.0" encoding="utf-8"?>
-<p:sld xmlns:a="http://schemas.openxmlformats.org/drawingml/2006/main" xmlns:p="http://schemas.openxmlformats.org/presentationml/2006/main" xmlns:r="http://schemas.openxmlformats.org/officeDocument/2006/relationships">
+<p:sld xmlns:a="http://schemas.openxmlformats.org/drawingml/2006/main" xmlns:r="http://schemas.openxmlformats.org/officeDocument/2006/relationships" xmlns:p="http://schemas.openxmlformats.org/presentationml/2006/main">
   <p:cSld>
     <p:bg>
       <p:bgPr>
@@ -11234,7 +11593,14 @@
         <p:cNvGrpSpPr/>
         <p:nvPr/>
       </p:nvGrpSpPr>
-      <p:grpSpPr/>
+      <p:grpSpPr>
+        <a:xfrm>
+          <a:off x="0" y="0"/>
+          <a:ext cx="0" cy="0"/>
+          <a:chOff x="0" y="0"/>
+          <a:chExt cx="0" cy="0"/>
+        </a:xfrm>
+      </p:grpSpPr>
       <p:sp>
         <p:nvSpPr>
           <p:cNvPr id="2" name="TextBox 1"/>
@@ -11312,6 +11678,7 @@
           <a:lstStyle/>
           <a:p>
             <a:pPr algn="ctr"/>
+            <a:endParaRPr/>
           </a:p>
         </p:txBody>
       </p:sp>
@@ -11354,10 +11721,12 @@
             <a:pPr>
               <a:buNone/>
             </a:pPr>
-            <a:r>
-              <a:rPr sz="400"/>
-              <a:t/>
-            </a:r>
+            <a:endParaRPr sz="2000" b="0" i="0">
+              <a:solidFill>
+                <a:srgbClr val="222222"/>
+              </a:solidFill>
+              <a:latin typeface="Helvetica Neue"/>
+            </a:endParaRPr>
           </a:p>
           <a:p>
             <a:pPr algn="l">
@@ -11386,10 +11755,12 @@
             <a:pPr>
               <a:buNone/>
             </a:pPr>
-            <a:r>
-              <a:rPr sz="400"/>
-              <a:t/>
-            </a:r>
+            <a:endParaRPr sz="2000" b="0" i="0">
+              <a:solidFill>
+                <a:srgbClr val="222222"/>
+              </a:solidFill>
+              <a:latin typeface="Helvetica Neue"/>
+            </a:endParaRPr>
           </a:p>
           <a:p>
             <a:pPr algn="l">
@@ -11418,10 +11789,12 @@
             <a:pPr>
               <a:buNone/>
             </a:pPr>
-            <a:r>
-              <a:rPr sz="400"/>
-              <a:t/>
-            </a:r>
+            <a:endParaRPr sz="2000" b="0" i="0">
+              <a:solidFill>
+                <a:srgbClr val="222222"/>
+              </a:solidFill>
+              <a:latin typeface="Helvetica Neue"/>
+            </a:endParaRPr>
           </a:p>
           <a:p>
             <a:pPr algn="l">
@@ -11450,10 +11823,12 @@
             <a:pPr>
               <a:buNone/>
             </a:pPr>
-            <a:r>
-              <a:rPr sz="400"/>
-              <a:t/>
-            </a:r>
+            <a:endParaRPr sz="2000" b="0" i="0">
+              <a:solidFill>
+                <a:srgbClr val="222222"/>
+              </a:solidFill>
+              <a:latin typeface="Helvetica Neue"/>
+            </a:endParaRPr>
           </a:p>
           <a:p>
             <a:pPr algn="l">
@@ -11482,10 +11857,12 @@
             <a:pPr>
               <a:buNone/>
             </a:pPr>
-            <a:r>
-              <a:rPr sz="400"/>
-              <a:t/>
-            </a:r>
+            <a:endParaRPr sz="2000" b="0" i="0">
+              <a:solidFill>
+                <a:srgbClr val="222222"/>
+              </a:solidFill>
+              <a:latin typeface="Helvetica Neue"/>
+            </a:endParaRPr>
           </a:p>
           <a:p>
             <a:pPr algn="l">
@@ -11549,7 +11926,7 @@
 </file>
 
 <file path=ppt/slides/slide8.xml><?xml version="1.0" encoding="utf-8"?>
-<p:sld xmlns:a="http://schemas.openxmlformats.org/drawingml/2006/main" xmlns:p="http://schemas.openxmlformats.org/presentationml/2006/main" xmlns:r="http://schemas.openxmlformats.org/officeDocument/2006/relationships">
+<p:sld xmlns:a="http://schemas.openxmlformats.org/drawingml/2006/main" xmlns:r="http://schemas.openxmlformats.org/officeDocument/2006/relationships" xmlns:p="http://schemas.openxmlformats.org/presentationml/2006/main">
   <p:cSld>
     <p:bg>
       <p:bgPr>
@@ -11565,7 +11942,14 @@
         <p:cNvGrpSpPr/>
         <p:nvPr/>
       </p:nvGrpSpPr>
-      <p:grpSpPr/>
+      <p:grpSpPr>
+        <a:xfrm>
+          <a:off x="0" y="0"/>
+          <a:ext cx="0" cy="0"/>
+          <a:chOff x="0" y="0"/>
+          <a:chExt cx="0" cy="0"/>
+        </a:xfrm>
+      </p:grpSpPr>
       <p:sp>
         <p:nvSpPr>
           <p:cNvPr id="2" name="TextBox 1"/>
@@ -11643,6 +12027,7 @@
           <a:lstStyle/>
           <a:p>
             <a:pPr algn="ctr"/>
+            <a:endParaRPr/>
           </a:p>
         </p:txBody>
       </p:sp>
@@ -11655,7 +12040,7 @@
         <p:spPr>
           <a:xfrm>
             <a:off x="640080" y="1417320"/>
-            <a:ext cx="10911535" cy="5212080"/>
+            <a:ext cx="10911535" cy="4708981"/>
           </a:xfrm>
           <a:prstGeom prst="rect">
             <a:avLst/>
@@ -11672,7 +12057,7 @@
               <a:buNone/>
             </a:pPr>
             <a:r>
-              <a:rPr sz="2000" b="0" i="0">
+              <a:rPr sz="2000" b="0" i="0" dirty="0">
                 <a:solidFill>
                   <a:srgbClr val="222222"/>
                 </a:solidFill>
@@ -11685,17 +12070,19 @@
             <a:pPr>
               <a:buNone/>
             </a:pPr>
-            <a:r>
-              <a:rPr sz="400"/>
-              <a:t/>
-            </a:r>
-          </a:p>
-          <a:p>
-            <a:pPr algn="l">
-              <a:buNone/>
-            </a:pPr>
-            <a:r>
-              <a:rPr sz="2000" b="1" i="0">
+            <a:endParaRPr sz="2000" b="0" i="0" dirty="0">
+              <a:solidFill>
+                <a:srgbClr val="222222"/>
+              </a:solidFill>
+              <a:latin typeface="Helvetica Neue"/>
+            </a:endParaRPr>
+          </a:p>
+          <a:p>
+            <a:pPr algn="l">
+              <a:buNone/>
+            </a:pPr>
+            <a:r>
+              <a:rPr sz="2000" b="1" i="0" dirty="0">
                 <a:solidFill>
                   <a:srgbClr val="222222"/>
                 </a:solidFill>
@@ -11704,7 +12091,7 @@
               <a:t>Your future self</a:t>
             </a:r>
             <a:r>
-              <a:rPr sz="2000" b="0" i="0">
+              <a:rPr sz="2000" b="0" i="0" dirty="0">
                 <a:solidFill>
                   <a:srgbClr val="222222"/>
                 </a:solidFill>
@@ -11717,17 +12104,19 @@
             <a:pPr>
               <a:buNone/>
             </a:pPr>
-            <a:r>
-              <a:rPr sz="400"/>
-              <a:t/>
-            </a:r>
-          </a:p>
-          <a:p>
-            <a:pPr algn="l">
-              <a:buNone/>
-            </a:pPr>
-            <a:r>
-              <a:rPr sz="2000" b="1" i="0">
+            <a:endParaRPr sz="2000" b="0" i="0" dirty="0">
+              <a:solidFill>
+                <a:srgbClr val="222222"/>
+              </a:solidFill>
+              <a:latin typeface="Helvetica Neue"/>
+            </a:endParaRPr>
+          </a:p>
+          <a:p>
+            <a:pPr algn="l">
+              <a:buNone/>
+            </a:pPr>
+            <a:r>
+              <a:rPr sz="2000" b="1" i="0" dirty="0">
                 <a:solidFill>
                   <a:srgbClr val="222222"/>
                 </a:solidFill>
@@ -11736,7 +12125,7 @@
               <a:t>Your examiner</a:t>
             </a:r>
             <a:r>
-              <a:rPr sz="2000" b="0" i="0">
+              <a:rPr sz="2000" b="0" i="0" dirty="0">
                 <a:solidFill>
                   <a:srgbClr val="222222"/>
                 </a:solidFill>
@@ -11749,17 +12138,19 @@
             <a:pPr>
               <a:buNone/>
             </a:pPr>
-            <a:r>
-              <a:rPr sz="400"/>
-              <a:t/>
-            </a:r>
-          </a:p>
-          <a:p>
-            <a:pPr algn="l">
-              <a:buNone/>
-            </a:pPr>
-            <a:r>
-              <a:rPr sz="2000" b="1" i="0">
+            <a:endParaRPr sz="2000" b="0" i="0" dirty="0">
+              <a:solidFill>
+                <a:srgbClr val="222222"/>
+              </a:solidFill>
+              <a:latin typeface="Helvetica Neue"/>
+            </a:endParaRPr>
+          </a:p>
+          <a:p>
+            <a:pPr algn="l">
+              <a:buNone/>
+            </a:pPr>
+            <a:r>
+              <a:rPr sz="2000" b="1" i="0" dirty="0">
                 <a:solidFill>
                   <a:srgbClr val="222222"/>
                 </a:solidFill>
@@ -11768,37 +12159,57 @@
               <a:t>The field</a:t>
             </a:r>
             <a:r>
-              <a:rPr sz="2000" b="0" i="0">
-                <a:solidFill>
-                  <a:srgbClr val="222222"/>
-                </a:solidFill>
-                <a:latin typeface="Helvetica Neue"/>
-              </a:rPr>
-              <a:t> — if your work is good, other people will want to build on it. They need to know what you did, how you did it, and what you learned. Reproducibility and extendability depend on documentation.</a:t>
+              <a:rPr sz="2000" b="0" i="0" dirty="0">
+                <a:solidFill>
+                  <a:srgbClr val="222222"/>
+                </a:solidFill>
+                <a:latin typeface="Helvetica Neue"/>
+              </a:rPr>
+              <a:t> — if your work is good, other people will want to build on it. They need to know what you did, how you did it, and what you learned. Reproducibility and </a:t>
+            </a:r>
+            <a:r>
+              <a:rPr sz="2000" b="0" i="0" dirty="0" err="1">
+                <a:solidFill>
+                  <a:srgbClr val="222222"/>
+                </a:solidFill>
+                <a:latin typeface="Helvetica Neue"/>
+              </a:rPr>
+              <a:t>extendability</a:t>
+            </a:r>
+            <a:r>
+              <a:rPr sz="2000" b="0" i="0" dirty="0">
+                <a:solidFill>
+                  <a:srgbClr val="222222"/>
+                </a:solidFill>
+                <a:latin typeface="Helvetica Neue"/>
+              </a:rPr>
+              <a:t> depend on documentation.</a:t>
             </a:r>
           </a:p>
           <a:p>
             <a:pPr>
               <a:buNone/>
             </a:pPr>
-            <a:r>
-              <a:rPr sz="400"/>
-              <a:t/>
-            </a:r>
-          </a:p>
-          <a:p>
-            <a:pPr algn="l">
-              <a:buNone/>
-            </a:pPr>
-            <a:r>
-              <a:rPr sz="2000" b="0" i="0">
-                <a:solidFill>
-                  <a:srgbClr val="222222"/>
-                </a:solidFill>
-                <a:latin typeface="Helvetica Neue"/>
-                <a:hlinkClick r:id="rId2"/>
-              </a:rPr>
-              <a:t>"Audiences"</a:t>
+            <a:endParaRPr sz="2000" b="0" i="0" dirty="0">
+              <a:solidFill>
+                <a:srgbClr val="222222"/>
+              </a:solidFill>
+              <a:latin typeface="Helvetica Neue"/>
+            </a:endParaRPr>
+          </a:p>
+          <a:p>
+            <a:pPr algn="l">
+              <a:buNone/>
+            </a:pPr>
+            <a:r>
+              <a:rPr sz="2000" b="0" i="0" dirty="0">
+                <a:solidFill>
+                  <a:srgbClr val="222222"/>
+                </a:solidFill>
+                <a:latin typeface="Helvetica Neue"/>
+                <a:hlinkClick r:id="rId3"/>
+              </a:rPr>
+              <a:t>Audiences</a:t>
             </a:r>
           </a:p>
         </p:txBody>
@@ -11849,7 +12260,7 @@
 </file>
 
 <file path=ppt/slides/slide9.xml><?xml version="1.0" encoding="utf-8"?>
-<p:sld xmlns:a="http://schemas.openxmlformats.org/drawingml/2006/main" xmlns:p="http://schemas.openxmlformats.org/presentationml/2006/main" xmlns:r="http://schemas.openxmlformats.org/officeDocument/2006/relationships">
+<p:sld xmlns:a="http://schemas.openxmlformats.org/drawingml/2006/main" xmlns:r="http://schemas.openxmlformats.org/officeDocument/2006/relationships" xmlns:p="http://schemas.openxmlformats.org/presentationml/2006/main">
   <p:cSld>
     <p:bg>
       <p:bgPr>
@@ -11865,7 +12276,14 @@
         <p:cNvGrpSpPr/>
         <p:nvPr/>
       </p:nvGrpSpPr>
-      <p:grpSpPr/>
+      <p:grpSpPr>
+        <a:xfrm>
+          <a:off x="0" y="0"/>
+          <a:ext cx="0" cy="0"/>
+          <a:chOff x="0" y="0"/>
+          <a:chExt cx="0" cy="0"/>
+        </a:xfrm>
+      </p:grpSpPr>
       <p:sp>
         <p:nvSpPr>
           <p:cNvPr id="2" name="TextBox 1"/>
@@ -11943,6 +12361,7 @@
           <a:lstStyle/>
           <a:p>
             <a:pPr algn="ctr"/>
+            <a:endParaRPr/>
           </a:p>
         </p:txBody>
       </p:sp>
@@ -11972,7 +12391,7 @@
               <a:buNone/>
             </a:pPr>
             <a:r>
-              <a:rPr sz="1800" b="0" i="0">
+              <a:rPr sz="1600" b="0" i="0" dirty="0">
                 <a:solidFill>
                   <a:srgbClr val="222222"/>
                 </a:solidFill>
@@ -11985,17 +12404,19 @@
             <a:pPr>
               <a:buNone/>
             </a:pPr>
-            <a:r>
-              <a:rPr sz="400"/>
-              <a:t/>
-            </a:r>
-          </a:p>
-          <a:p>
-            <a:pPr algn="l">
-              <a:buNone/>
-            </a:pPr>
-            <a:r>
-              <a:rPr sz="1800" b="1" i="0">
+            <a:endParaRPr sz="1600" b="0" i="0" dirty="0">
+              <a:solidFill>
+                <a:srgbClr val="222222"/>
+              </a:solidFill>
+              <a:latin typeface="Helvetica Neue"/>
+            </a:endParaRPr>
+          </a:p>
+          <a:p>
+            <a:pPr algn="l">
+              <a:buNone/>
+            </a:pPr>
+            <a:r>
+              <a:rPr sz="1600" b="1" i="0" dirty="0">
                 <a:solidFill>
                   <a:srgbClr val="222222"/>
                 </a:solidFill>
@@ -12004,7 +12425,7 @@
               <a:t>1. The artefact itself</a:t>
             </a:r>
             <a:r>
-              <a:rPr sz="1800" b="0" i="0">
+              <a:rPr sz="1600" b="0" i="0" dirty="0">
                 <a:solidFill>
                   <a:srgbClr val="222222"/>
                 </a:solidFill>
@@ -12017,17 +12438,19 @@
             <a:pPr>
               <a:buNone/>
             </a:pPr>
-            <a:r>
-              <a:rPr sz="400"/>
-              <a:t/>
-            </a:r>
-          </a:p>
-          <a:p>
-            <a:pPr algn="l">
-              <a:buNone/>
-            </a:pPr>
-            <a:r>
-              <a:rPr sz="1800" b="1" i="0">
+            <a:endParaRPr sz="1600" b="0" i="0" dirty="0">
+              <a:solidFill>
+                <a:srgbClr val="222222"/>
+              </a:solidFill>
+              <a:latin typeface="Helvetica Neue"/>
+            </a:endParaRPr>
+          </a:p>
+          <a:p>
+            <a:pPr algn="l">
+              <a:buNone/>
+            </a:pPr>
+            <a:r>
+              <a:rPr sz="1600" b="1" i="0" dirty="0">
                 <a:solidFill>
                   <a:srgbClr val="222222"/>
                 </a:solidFill>
@@ -12036,7 +12459,7 @@
               <a:t>2. Technical specification</a:t>
             </a:r>
             <a:r>
-              <a:rPr sz="1800" b="0" i="0">
+              <a:rPr sz="1600" b="0" i="0" dirty="0">
                 <a:solidFill>
                   <a:srgbClr val="222222"/>
                 </a:solidFill>
@@ -12049,17 +12472,19 @@
             <a:pPr>
               <a:buNone/>
             </a:pPr>
-            <a:r>
-              <a:rPr sz="400"/>
-              <a:t/>
-            </a:r>
-          </a:p>
-          <a:p>
-            <a:pPr algn="l">
-              <a:buNone/>
-            </a:pPr>
-            <a:r>
-              <a:rPr sz="1800" b="1" i="0">
+            <a:endParaRPr sz="1600" b="0" i="0" dirty="0">
+              <a:solidFill>
+                <a:srgbClr val="222222"/>
+              </a:solidFill>
+              <a:latin typeface="Helvetica Neue"/>
+            </a:endParaRPr>
+          </a:p>
+          <a:p>
+            <a:pPr algn="l">
+              <a:buNone/>
+            </a:pPr>
+            <a:r>
+              <a:rPr sz="1600" b="1" i="0" dirty="0">
                 <a:solidFill>
                   <a:srgbClr val="222222"/>
                 </a:solidFill>
@@ -12068,7 +12493,7 @@
               <a:t>3. Process record</a:t>
             </a:r>
             <a:r>
-              <a:rPr sz="1800" b="0" i="0">
+              <a:rPr sz="1600" b="0" i="0" dirty="0">
                 <a:solidFill>
                   <a:srgbClr val="222222"/>
                 </a:solidFill>
@@ -12081,17 +12506,19 @@
             <a:pPr>
               <a:buNone/>
             </a:pPr>
-            <a:r>
-              <a:rPr sz="400"/>
-              <a:t/>
-            </a:r>
-          </a:p>
-          <a:p>
-            <a:pPr algn="l">
-              <a:buNone/>
-            </a:pPr>
-            <a:r>
-              <a:rPr sz="1800" b="1" i="0">
+            <a:endParaRPr sz="1600" b="0" i="0" dirty="0">
+              <a:solidFill>
+                <a:srgbClr val="222222"/>
+              </a:solidFill>
+              <a:latin typeface="Helvetica Neue"/>
+            </a:endParaRPr>
+          </a:p>
+          <a:p>
+            <a:pPr algn="l">
+              <a:buNone/>
+            </a:pPr>
+            <a:r>
+              <a:rPr sz="1600" b="1" i="0" dirty="0">
                 <a:solidFill>
                   <a:srgbClr val="222222"/>
                 </a:solidFill>
@@ -12100,7 +12527,7 @@
               <a:t>4. Reflective commentary</a:t>
             </a:r>
             <a:r>
-              <a:rPr sz="1800" b="0" i="0">
+              <a:rPr sz="1600" b="0" i="0" dirty="0">
                 <a:solidFill>
                   <a:srgbClr val="222222"/>
                 </a:solidFill>
@@ -12113,17 +12540,19 @@
             <a:pPr>
               <a:buNone/>
             </a:pPr>
-            <a:r>
-              <a:rPr sz="400"/>
-              <a:t/>
-            </a:r>
-          </a:p>
-          <a:p>
-            <a:pPr algn="l">
-              <a:buNone/>
-            </a:pPr>
-            <a:r>
-              <a:rPr sz="1800" b="1" i="0">
+            <a:endParaRPr sz="1600" b="0" i="0" dirty="0">
+              <a:solidFill>
+                <a:srgbClr val="222222"/>
+              </a:solidFill>
+              <a:latin typeface="Helvetica Neue"/>
+            </a:endParaRPr>
+          </a:p>
+          <a:p>
+            <a:pPr algn="l">
+              <a:buNone/>
+            </a:pPr>
+            <a:r>
+              <a:rPr sz="1600" b="1" i="0" dirty="0">
                 <a:solidFill>
                   <a:srgbClr val="222222"/>
                 </a:solidFill>
@@ -12132,7 +12561,7 @@
               <a:t>5. Critical framing</a:t>
             </a:r>
             <a:r>
-              <a:rPr sz="1800" b="0" i="0">
+              <a:rPr sz="1600" b="0" i="0" dirty="0">
                 <a:solidFill>
                   <a:srgbClr val="222222"/>
                 </a:solidFill>
@@ -12145,17 +12574,19 @@
             <a:pPr>
               <a:buNone/>
             </a:pPr>
-            <a:r>
-              <a:rPr sz="400"/>
-              <a:t/>
-            </a:r>
-          </a:p>
-          <a:p>
-            <a:pPr algn="l">
-              <a:buNone/>
-            </a:pPr>
-            <a:r>
-              <a:rPr sz="1800" b="0" i="0">
+            <a:endParaRPr sz="1600" b="0" i="0" dirty="0">
+              <a:solidFill>
+                <a:srgbClr val="222222"/>
+              </a:solidFill>
+              <a:latin typeface="Helvetica Neue"/>
+            </a:endParaRPr>
+          </a:p>
+          <a:p>
+            <a:pPr algn="l">
+              <a:buNone/>
+            </a:pPr>
+            <a:r>
+              <a:rPr sz="1600" b="0" i="0" dirty="0">
                 <a:solidFill>
                   <a:srgbClr val="222222"/>
                 </a:solidFill>
@@ -12164,7 +12595,7 @@
               <a:t>Layers 1–3 are </a:t>
             </a:r>
             <a:r>
-              <a:rPr sz="1800" b="1" i="0">
+              <a:rPr sz="1600" b="1" i="0" dirty="0">
                 <a:solidFill>
                   <a:srgbClr val="222222"/>
                 </a:solidFill>
@@ -12173,7 +12604,7 @@
               <a:t>records</a:t>
             </a:r>
             <a:r>
-              <a:rPr sz="1800" b="0" i="0">
+              <a:rPr sz="1600" b="0" i="0" dirty="0">
                 <a:solidFill>
                   <a:srgbClr val="222222"/>
                 </a:solidFill>
@@ -12182,7 +12613,7 @@
               <a:t>. Layer 4 is </a:t>
             </a:r>
             <a:r>
-              <a:rPr sz="1800" b="1" i="0">
+              <a:rPr sz="1600" b="1" i="0" dirty="0">
                 <a:solidFill>
                   <a:srgbClr val="222222"/>
                 </a:solidFill>
@@ -12191,7 +12622,7 @@
               <a:t>reflection</a:t>
             </a:r>
             <a:r>
-              <a:rPr sz="1800" b="0" i="0">
+              <a:rPr sz="1600" b="0" i="0" dirty="0">
                 <a:solidFill>
                   <a:srgbClr val="222222"/>
                 </a:solidFill>
@@ -12200,7 +12631,7 @@
               <a:t>. Layer 5 is </a:t>
             </a:r>
             <a:r>
-              <a:rPr sz="1800" b="1" i="0">
+              <a:rPr sz="1600" b="1" i="0" dirty="0">
                 <a:solidFill>
                   <a:srgbClr val="222222"/>
                 </a:solidFill>
@@ -12209,7 +12640,7 @@
               <a:t>analysis</a:t>
             </a:r>
             <a:r>
-              <a:rPr sz="1800" b="0" i="0">
+              <a:rPr sz="1600" b="0" i="0" dirty="0">
                 <a:solidFill>
                   <a:srgbClr val="222222"/>
                 </a:solidFill>
@@ -12222,24 +12653,26 @@
             <a:pPr>
               <a:buNone/>
             </a:pPr>
-            <a:r>
-              <a:rPr sz="400"/>
-              <a:t/>
-            </a:r>
-          </a:p>
-          <a:p>
-            <a:pPr algn="l">
-              <a:buNone/>
-            </a:pPr>
-            <a:r>
-              <a:rPr sz="1800" b="0" i="0">
-                <a:solidFill>
-                  <a:srgbClr val="222222"/>
-                </a:solidFill>
-                <a:latin typeface="Helvetica Neue"/>
-                <a:hlinkClick r:id="rId2"/>
-              </a:rPr>
-              <a:t>"Five Layers"</a:t>
+            <a:endParaRPr sz="1600" b="0" i="0" dirty="0">
+              <a:solidFill>
+                <a:srgbClr val="222222"/>
+              </a:solidFill>
+              <a:latin typeface="Helvetica Neue"/>
+            </a:endParaRPr>
+          </a:p>
+          <a:p>
+            <a:pPr algn="l">
+              <a:buNone/>
+            </a:pPr>
+            <a:r>
+              <a:rPr sz="1600" b="0" i="0" dirty="0">
+                <a:solidFill>
+                  <a:srgbClr val="222222"/>
+                </a:solidFill>
+                <a:latin typeface="Helvetica Neue"/>
+                <a:hlinkClick r:id="rId3"/>
+              </a:rPr>
+              <a:t>Five Layers</a:t>
             </a:r>
           </a:p>
         </p:txBody>
@@ -12620,44 +13053,44 @@
         <a:sysClr val="window" lastClr="FFFFFF"/>
       </a:lt1>
       <a:dk2>
-        <a:srgbClr val="1F497D"/>
+        <a:srgbClr val="0E2841"/>
       </a:dk2>
       <a:lt2>
-        <a:srgbClr val="EEECE1"/>
+        <a:srgbClr val="E8E8E8"/>
       </a:lt2>
       <a:accent1>
-        <a:srgbClr val="4F81BD"/>
+        <a:srgbClr val="156082"/>
       </a:accent1>
       <a:accent2>
-        <a:srgbClr val="C0504D"/>
+        <a:srgbClr val="E97132"/>
       </a:accent2>
       <a:accent3>
-        <a:srgbClr val="9BBB59"/>
+        <a:srgbClr val="196B24"/>
       </a:accent3>
       <a:accent4>
-        <a:srgbClr val="8064A2"/>
+        <a:srgbClr val="0F9ED5"/>
       </a:accent4>
       <a:accent5>
-        <a:srgbClr val="4BACC6"/>
+        <a:srgbClr val="A02B93"/>
       </a:accent5>
       <a:accent6>
-        <a:srgbClr val="F79646"/>
+        <a:srgbClr val="4EA72E"/>
       </a:accent6>
       <a:hlink>
-        <a:srgbClr val="0000FF"/>
+        <a:srgbClr val="467886"/>
       </a:hlink>
       <a:folHlink>
-        <a:srgbClr val="800080"/>
+        <a:srgbClr val="96607D"/>
       </a:folHlink>
     </a:clrScheme>
     <a:fontScheme name="Office">
       <a:majorFont>
-        <a:latin typeface="Calibri"/>
+        <a:latin typeface="Aptos Display" panose="02110004020202020204"/>
         <a:ea typeface=""/>
         <a:cs typeface=""/>
-        <a:font script="Jpan" typeface="ＭＳ Ｐゴシック"/>
+        <a:font script="Jpan" typeface="游ゴシック Light"/>
         <a:font script="Hang" typeface="맑은 고딕"/>
-        <a:font script="Hans" typeface="宋体"/>
+        <a:font script="Hans" typeface="等线 Light"/>
         <a:font script="Hant" typeface="新細明體"/>
         <a:font script="Arab" typeface="Times New Roman"/>
         <a:font script="Hebr" typeface="Times New Roman"/>
@@ -12685,14 +13118,31 @@
         <a:font script="Viet" typeface="Times New Roman"/>
         <a:font script="Uigh" typeface="Microsoft Uighur"/>
         <a:font script="Geor" typeface="Sylfaen"/>
+        <a:font script="Armn" typeface="Arial"/>
+        <a:font script="Bugi" typeface="Leelawadee UI"/>
+        <a:font script="Bopo" typeface="Microsoft JhengHei"/>
+        <a:font script="Java" typeface="Javanese Text"/>
+        <a:font script="Lisu" typeface="Segoe UI"/>
+        <a:font script="Mymr" typeface="Myanmar Text"/>
+        <a:font script="Nkoo" typeface="Ebrima"/>
+        <a:font script="Olck" typeface="Nirmala UI"/>
+        <a:font script="Osma" typeface="Ebrima"/>
+        <a:font script="Phag" typeface="Phagspa"/>
+        <a:font script="Syrn" typeface="Estrangelo Edessa"/>
+        <a:font script="Syrj" typeface="Estrangelo Edessa"/>
+        <a:font script="Syre" typeface="Estrangelo Edessa"/>
+        <a:font script="Sora" typeface="Nirmala UI"/>
+        <a:font script="Tale" typeface="Microsoft Tai Le"/>
+        <a:font script="Talu" typeface="Microsoft New Tai Lue"/>
+        <a:font script="Tfng" typeface="Ebrima"/>
       </a:majorFont>
       <a:minorFont>
-        <a:latin typeface="Calibri"/>
+        <a:latin typeface="Aptos" panose="02110004020202020204"/>
         <a:ea typeface=""/>
         <a:cs typeface=""/>
-        <a:font script="Jpan" typeface="ＭＳ Ｐゴシック"/>
+        <a:font script="Jpan" typeface="游ゴシック"/>
         <a:font script="Hang" typeface="맑은 고딕"/>
-        <a:font script="Hans" typeface="宋体"/>
+        <a:font script="Hans" typeface="等线"/>
         <a:font script="Hant" typeface="新細明體"/>
         <a:font script="Arab" typeface="Arial"/>
         <a:font script="Hebr" typeface="Arial"/>
@@ -12720,6 +13170,23 @@
         <a:font script="Viet" typeface="Arial"/>
         <a:font script="Uigh" typeface="Microsoft Uighur"/>
         <a:font script="Geor" typeface="Sylfaen"/>
+        <a:font script="Armn" typeface="Arial"/>
+        <a:font script="Bugi" typeface="Leelawadee UI"/>
+        <a:font script="Bopo" typeface="Microsoft JhengHei"/>
+        <a:font script="Java" typeface="Javanese Text"/>
+        <a:font script="Lisu" typeface="Segoe UI"/>
+        <a:font script="Mymr" typeface="Myanmar Text"/>
+        <a:font script="Nkoo" typeface="Ebrima"/>
+        <a:font script="Olck" typeface="Nirmala UI"/>
+        <a:font script="Osma" typeface="Ebrima"/>
+        <a:font script="Phag" typeface="Phagspa"/>
+        <a:font script="Syrn" typeface="Estrangelo Edessa"/>
+        <a:font script="Syrj" typeface="Estrangelo Edessa"/>
+        <a:font script="Syre" typeface="Estrangelo Edessa"/>
+        <a:font script="Sora" typeface="Nirmala UI"/>
+        <a:font script="Tale" typeface="Microsoft Tai Le"/>
+        <a:font script="Talu" typeface="Microsoft New Tai Lue"/>
+        <a:font script="Tfng" typeface="Ebrima"/>
       </a:minorFont>
     </a:fontScheme>
     <a:fmtScheme name="Office">
@@ -12731,180 +13198,136 @@
           <a:gsLst>
             <a:gs pos="0">
               <a:schemeClr val="phClr">
-                <a:tint val="50000"/>
-                <a:satMod val="300000"/>
+                <a:lumMod val="110000"/>
+                <a:satMod val="105000"/>
+                <a:tint val="67000"/>
               </a:schemeClr>
             </a:gs>
-            <a:gs pos="35000">
+            <a:gs pos="50000">
               <a:schemeClr val="phClr">
-                <a:tint val="37000"/>
-                <a:satMod val="300000"/>
+                <a:lumMod val="105000"/>
+                <a:satMod val="103000"/>
+                <a:tint val="73000"/>
               </a:schemeClr>
             </a:gs>
             <a:gs pos="100000">
               <a:schemeClr val="phClr">
-                <a:tint val="15000"/>
-                <a:satMod val="350000"/>
+                <a:lumMod val="105000"/>
+                <a:satMod val="109000"/>
+                <a:tint val="81000"/>
               </a:schemeClr>
             </a:gs>
           </a:gsLst>
-          <a:lin ang="16200000" scaled="1"/>
+          <a:lin ang="5400000" scaled="0"/>
         </a:gradFill>
         <a:gradFill rotWithShape="1">
           <a:gsLst>
             <a:gs pos="0">
               <a:schemeClr val="phClr">
-                <a:tint val="100000"/>
+                <a:satMod val="103000"/>
+                <a:lumMod val="102000"/>
+                <a:tint val="94000"/>
+              </a:schemeClr>
+            </a:gs>
+            <a:gs pos="50000">
+              <a:schemeClr val="phClr">
+                <a:satMod val="110000"/>
+                <a:lumMod val="100000"/>
                 <a:shade val="100000"/>
-                <a:satMod val="130000"/>
               </a:schemeClr>
             </a:gs>
             <a:gs pos="100000">
               <a:schemeClr val="phClr">
-                <a:tint val="50000"/>
-                <a:shade val="100000"/>
-                <a:satMod val="350000"/>
+                <a:lumMod val="99000"/>
+                <a:satMod val="120000"/>
+                <a:shade val="78000"/>
               </a:schemeClr>
             </a:gs>
           </a:gsLst>
-          <a:lin ang="16200000" scaled="0"/>
+          <a:lin ang="5400000" scaled="0"/>
         </a:gradFill>
       </a:fillStyleLst>
       <a:lnStyleLst>
-        <a:ln w="9525" cap="flat" cmpd="sng" algn="ctr">
+        <a:ln w="12700" cap="flat" cmpd="sng" algn="ctr">
           <a:solidFill>
-            <a:schemeClr val="phClr">
-              <a:shade val="95000"/>
-              <a:satMod val="105000"/>
-            </a:schemeClr>
+            <a:schemeClr val="phClr"/>
           </a:solidFill>
           <a:prstDash val="solid"/>
+          <a:miter lim="800000"/>
+        </a:ln>
+        <a:ln w="19050" cap="flat" cmpd="sng" algn="ctr">
+          <a:solidFill>
+            <a:schemeClr val="phClr"/>
+          </a:solidFill>
+          <a:prstDash val="solid"/>
+          <a:miter lim="800000"/>
         </a:ln>
         <a:ln w="25400" cap="flat" cmpd="sng" algn="ctr">
           <a:solidFill>
             <a:schemeClr val="phClr"/>
           </a:solidFill>
           <a:prstDash val="solid"/>
-        </a:ln>
-        <a:ln w="38100" cap="flat" cmpd="sng" algn="ctr">
-          <a:solidFill>
-            <a:schemeClr val="phClr"/>
-          </a:solidFill>
-          <a:prstDash val="solid"/>
+          <a:miter lim="800000"/>
         </a:ln>
       </a:lnStyleLst>
       <a:effectStyleLst>
         <a:effectStyle>
+          <a:effectLst/>
+        </a:effectStyle>
+        <a:effectStyle>
+          <a:effectLst/>
+        </a:effectStyle>
+        <a:effectStyle>
           <a:effectLst>
-            <a:outerShdw blurRad="40000" dist="20000" dir="5400000" rotWithShape="0">
+            <a:outerShdw blurRad="57150" dist="19050" dir="5400000" algn="ctr" rotWithShape="0">
               <a:srgbClr val="000000">
-                <a:alpha val="38000"/>
+                <a:alpha val="63000"/>
               </a:srgbClr>
             </a:outerShdw>
           </a:effectLst>
-        </a:effectStyle>
-        <a:effectStyle>
-          <a:effectLst>
-            <a:outerShdw blurRad="40000" dist="23000" dir="5400000" rotWithShape="0">
-              <a:srgbClr val="000000">
-                <a:alpha val="35000"/>
-              </a:srgbClr>
-            </a:outerShdw>
-          </a:effectLst>
-        </a:effectStyle>
-        <a:effectStyle>
-          <a:effectLst>
-            <a:outerShdw blurRad="40000" dist="23000" dir="5400000" rotWithShape="0">
-              <a:srgbClr val="000000">
-                <a:alpha val="35000"/>
-              </a:srgbClr>
-            </a:outerShdw>
-          </a:effectLst>
-          <a:scene3d>
-            <a:camera prst="orthographicFront">
-              <a:rot lat="0" lon="0" rev="0"/>
-            </a:camera>
-            <a:lightRig rig="threePt" dir="t">
-              <a:rot lat="0" lon="0" rev="1200000"/>
-            </a:lightRig>
-          </a:scene3d>
-          <a:sp3d>
-            <a:bevelT w="63500" h="25400"/>
-          </a:sp3d>
         </a:effectStyle>
       </a:effectStyleLst>
       <a:bgFillStyleLst>
         <a:solidFill>
           <a:schemeClr val="phClr"/>
         </a:solidFill>
+        <a:solidFill>
+          <a:schemeClr val="phClr">
+            <a:tint val="95000"/>
+            <a:satMod val="170000"/>
+          </a:schemeClr>
+        </a:solidFill>
         <a:gradFill rotWithShape="1">
           <a:gsLst>
             <a:gs pos="0">
               <a:schemeClr val="phClr">
-                <a:tint val="40000"/>
-                <a:satMod val="350000"/>
+                <a:tint val="93000"/>
+                <a:satMod val="150000"/>
+                <a:shade val="98000"/>
+                <a:lumMod val="102000"/>
               </a:schemeClr>
             </a:gs>
-            <a:gs pos="40000">
+            <a:gs pos="50000">
               <a:schemeClr val="phClr">
-                <a:tint val="45000"/>
-                <a:shade val="99000"/>
-                <a:satMod val="350000"/>
+                <a:tint val="98000"/>
+                <a:satMod val="130000"/>
+                <a:shade val="90000"/>
+                <a:lumMod val="103000"/>
               </a:schemeClr>
             </a:gs>
             <a:gs pos="100000">
               <a:schemeClr val="phClr">
-                <a:shade val="20000"/>
-                <a:satMod val="255000"/>
+                <a:shade val="63000"/>
+                <a:satMod val="120000"/>
               </a:schemeClr>
             </a:gs>
           </a:gsLst>
-          <a:path path="circle">
-            <a:fillToRect l="50000" t="-80000" r="50000" b="180000"/>
-          </a:path>
-        </a:gradFill>
-        <a:gradFill rotWithShape="1">
-          <a:gsLst>
-            <a:gs pos="0">
-              <a:schemeClr val="phClr">
-                <a:tint val="80000"/>
-                <a:satMod val="300000"/>
-              </a:schemeClr>
-            </a:gs>
-            <a:gs pos="100000">
-              <a:schemeClr val="phClr">
-                <a:shade val="30000"/>
-                <a:satMod val="200000"/>
-              </a:schemeClr>
-            </a:gs>
-          </a:gsLst>
-          <a:path path="circle">
-            <a:fillToRect l="50000" t="50000" r="50000" b="50000"/>
-          </a:path>
+          <a:lin ang="5400000" scaled="0"/>
         </a:gradFill>
       </a:bgFillStyleLst>
     </a:fmtScheme>
   </a:themeElements>
   <a:objectDefaults>
-    <a:spDef>
-      <a:spPr/>
-      <a:bodyPr/>
-      <a:lstStyle/>
-      <a:style>
-        <a:lnRef idx="1">
-          <a:schemeClr val="accent1"/>
-        </a:lnRef>
-        <a:fillRef idx="3">
-          <a:schemeClr val="accent1"/>
-        </a:fillRef>
-        <a:effectRef idx="2">
-          <a:schemeClr val="accent1"/>
-        </a:effectRef>
-        <a:fontRef idx="minor">
-          <a:schemeClr val="lt1"/>
-        </a:fontRef>
-      </a:style>
-    </a:spDef>
     <a:lnDef>
       <a:spPr/>
       <a:bodyPr/>
@@ -12926,5 +13349,10 @@
     </a:lnDef>
   </a:objectDefaults>
   <a:extraClrSchemeLst/>
+  <a:extLst>
+    <a:ext uri="{05A4C25C-085E-4340-85A3-A5531E510DB2}">
+      <thm15:themeFamily xmlns:thm15="http://schemas.microsoft.com/office/thememl/2012/main" name="Office Theme" id="{2E142A2C-CD16-42D6-873A-C26D2A0506FA}" vid="{1BDDFF52-6CD6-40A5-AB3C-68EB2F1E4D0A}"/>
+    </a:ext>
+  </a:extLst>
 </a:theme>
 </file>
--- a/Week5/week5_lecture_slides.pptx
+++ b/Week5/week5_lecture_slides.pptx
@@ -5,7 +5,7 @@
     <p:sldMasterId id="2147483648" r:id="rId1"/>
   </p:sldMasterIdLst>
   <p:notesMasterIdLst>
-    <p:notesMasterId r:id="rId25"/>
+    <p:notesMasterId r:id="rId24"/>
   </p:notesMasterIdLst>
   <p:sldIdLst>
     <p:sldId id="256" r:id="rId2"/>
@@ -30,7 +30,6 @@
     <p:sldId id="275" r:id="rId21"/>
     <p:sldId id="276" r:id="rId22"/>
     <p:sldId id="277" r:id="rId23"/>
-    <p:sldId id="278" r:id="rId24"/>
   </p:sldIdLst>
   <p:sldSz cx="12192000" cy="6858000"/>
   <p:notesSz cx="6858000" cy="9144000"/>
@@ -10088,194 +10087,6 @@
                 <a:latin typeface="Helvetica Neue"/>
               </a:rPr>
               <a:t>22</a:t>
-            </a:r>
-          </a:p>
-        </p:txBody>
-      </p:sp>
-    </p:spTree>
-  </p:cSld>
-  <p:clrMapOvr>
-    <a:masterClrMapping/>
-  </p:clrMapOvr>
-</p:sld>
-</file>
-
-<file path=ppt/slides/slide23.xml><?xml version="1.0" encoding="utf-8"?>
-<p:sld xmlns:a="http://schemas.openxmlformats.org/drawingml/2006/main" xmlns:r="http://schemas.openxmlformats.org/officeDocument/2006/relationships" xmlns:p="http://schemas.openxmlformats.org/presentationml/2006/main">
-  <p:cSld>
-    <p:bg>
-      <p:bgPr>
-        <a:solidFill>
-          <a:srgbClr val="FFFFFF"/>
-        </a:solidFill>
-        <a:effectLst/>
-      </p:bgPr>
-    </p:bg>
-    <p:spTree>
-      <p:nvGrpSpPr>
-        <p:cNvPr id="1" name=""/>
-        <p:cNvGrpSpPr/>
-        <p:nvPr/>
-      </p:nvGrpSpPr>
-      <p:grpSpPr>
-        <a:xfrm>
-          <a:off x="0" y="0"/>
-          <a:ext cx="0" cy="0"/>
-          <a:chOff x="0" y="0"/>
-          <a:chExt cx="0" cy="0"/>
-        </a:xfrm>
-      </p:grpSpPr>
-      <p:sp>
-        <p:nvSpPr>
-          <p:cNvPr id="2" name="TextBox 1"/>
-          <p:cNvSpPr txBox="1"/>
-          <p:nvPr/>
-        </p:nvSpPr>
-        <p:spPr>
-          <a:xfrm>
-            <a:off x="640080" y="320040"/>
-            <a:ext cx="10911535" cy="1188720"/>
-          </a:xfrm>
-          <a:prstGeom prst="rect">
-            <a:avLst/>
-          </a:prstGeom>
-          <a:noFill/>
-        </p:spPr>
-        <p:txBody>
-          <a:bodyPr wrap="square">
-            <a:spAutoFit/>
-          </a:bodyPr>
-          <a:lstStyle/>
-          <a:p>
-            <a:pPr algn="l">
-              <a:buNone/>
-            </a:pPr>
-            <a:r>
-              <a:rPr sz="2400" b="1" i="0">
-                <a:solidFill>
-                  <a:srgbClr val="1A1A2E"/>
-                </a:solidFill>
-                <a:latin typeface="Helvetica Neue"/>
-              </a:rPr>
-              <a:t>End of deck</a:t>
-            </a:r>
-          </a:p>
-        </p:txBody>
-      </p:sp>
-      <p:sp>
-        <p:nvSpPr>
-          <p:cNvPr id="3" name="Rectangle 2"/>
-          <p:cNvSpPr/>
-          <p:nvPr/>
-        </p:nvSpPr>
-        <p:spPr>
-          <a:xfrm>
-            <a:off x="640080" y="1417320"/>
-            <a:ext cx="10911535" cy="31750"/>
-          </a:xfrm>
-          <a:prstGeom prst="rect">
-            <a:avLst/>
-          </a:prstGeom>
-          <a:solidFill>
-            <a:srgbClr val="2E86AB"/>
-          </a:solidFill>
-          <a:ln>
-            <a:noFill/>
-          </a:ln>
-        </p:spPr>
-        <p:style>
-          <a:lnRef idx="1">
-            <a:schemeClr val="accent1"/>
-          </a:lnRef>
-          <a:fillRef idx="3">
-            <a:schemeClr val="accent1"/>
-          </a:fillRef>
-          <a:effectRef idx="2">
-            <a:schemeClr val="accent1"/>
-          </a:effectRef>
-          <a:fontRef idx="minor">
-            <a:schemeClr val="lt1"/>
-          </a:fontRef>
-        </p:style>
-        <p:txBody>
-          <a:bodyPr rtlCol="0" anchor="ctr"/>
-          <a:lstStyle/>
-          <a:p>
-            <a:pPr algn="ctr"/>
-            <a:endParaRPr/>
-          </a:p>
-        </p:txBody>
-      </p:sp>
-      <p:sp>
-        <p:nvSpPr>
-          <p:cNvPr id="4" name="TextBox 3"/>
-          <p:cNvSpPr txBox="1"/>
-          <p:nvPr/>
-        </p:nvSpPr>
-        <p:spPr>
-          <a:xfrm>
-            <a:off x="640080" y="1417320"/>
-            <a:ext cx="10911535" cy="5212080"/>
-          </a:xfrm>
-          <a:prstGeom prst="rect">
-            <a:avLst/>
-          </a:prstGeom>
-          <a:noFill/>
-        </p:spPr>
-        <p:txBody>
-          <a:bodyPr wrap="square">
-            <a:spAutoFit/>
-          </a:bodyPr>
-          <a:lstStyle/>
-          <a:p>
-            <a:pPr algn="l">
-              <a:buNone/>
-            </a:pPr>
-            <a:r>
-              <a:rPr sz="2000" b="0" i="0">
-                <a:solidFill>
-                  <a:srgbClr val="222222"/>
-                </a:solidFill>
-                <a:latin typeface="Helvetica Neue"/>
-              </a:rPr>
-              <a:t># End of deck</a:t>
-            </a:r>
-          </a:p>
-        </p:txBody>
-      </p:sp>
-      <p:sp>
-        <p:nvSpPr>
-          <p:cNvPr id="5" name="TextBox 4"/>
-          <p:cNvSpPr txBox="1"/>
-          <p:nvPr/>
-        </p:nvSpPr>
-        <p:spPr>
-          <a:xfrm>
-            <a:off x="11094415" y="6446520"/>
-            <a:ext cx="914400" cy="320040"/>
-          </a:xfrm>
-          <a:prstGeom prst="rect">
-            <a:avLst/>
-          </a:prstGeom>
-          <a:noFill/>
-        </p:spPr>
-        <p:txBody>
-          <a:bodyPr wrap="square">
-            <a:spAutoFit/>
-          </a:bodyPr>
-          <a:lstStyle/>
-          <a:p>
-            <a:pPr algn="r">
-              <a:buNone/>
-            </a:pPr>
-            <a:r>
-              <a:rPr sz="1000">
-                <a:solidFill>
-                  <a:srgbClr val="AAAAAA"/>
-                </a:solidFill>
-                <a:latin typeface="Helvetica Neue"/>
-              </a:rPr>
-              <a:t>23</a:t>
             </a:r>
           </a:p>
         </p:txBody>
